--- a/output_pptx/Who_You_Say_I_Am.pptx
+++ b/output_pptx/Who_You_Say_I_Am.pptx
@@ -3122,23 +3122,23 @@
         </p:nvSpPr>
         <p:spPr>
           <a:xfrm>
-            <a:off x="594360" y="2258568"/>
-            <a:ext cx="11002975" cy="685800"/>
-          </a:xfrm>
-          <a:prstGeom prst="rect">
-            <a:avLst/>
-          </a:prstGeom>
-          <a:noFill/>
-        </p:spPr>
-        <p:txBody>
-          <a:bodyPr wrap="square">
-            <a:spAutoFit/>
-          </a:bodyPr>
-          <a:lstStyle/>
-          <a:p>
-            <a:pPr algn="ctr"/>
-            <a:r>
-              <a:rPr sz="4400" b="1" i="0">
+            <a:off x="640080" y="2052828"/>
+            <a:ext cx="10911535" cy="731520"/>
+          </a:xfrm>
+          <a:prstGeom prst="rect">
+            <a:avLst/>
+          </a:prstGeom>
+          <a:noFill/>
+        </p:spPr>
+        <p:txBody>
+          <a:bodyPr wrap="square">
+            <a:spAutoFit/>
+          </a:bodyPr>
+          <a:lstStyle/>
+          <a:p>
+            <a:pPr algn="ctr"/>
+            <a:r>
+              <a:rPr sz="4800" b="1" i="0">
                 <a:solidFill>
                   <a:srgbClr val="FFFFFF"/>
                 </a:solidFill>
@@ -3157,29 +3157,29 @@
         </p:nvSpPr>
         <p:spPr>
           <a:xfrm>
-            <a:off x="594360" y="2980944"/>
-            <a:ext cx="11002975" cy="347472"/>
-          </a:xfrm>
-          <a:prstGeom prst="rect">
-            <a:avLst/>
-          </a:prstGeom>
-          <a:noFill/>
-        </p:spPr>
-        <p:txBody>
-          <a:bodyPr wrap="square">
-            <a:spAutoFit/>
-          </a:bodyPr>
-          <a:lstStyle/>
-          <a:p>
-            <a:pPr algn="ctr"/>
-            <a:r>
-              <a:rPr sz="2200" b="0" i="1">
-                <a:solidFill>
-                  <a:srgbClr val="8C8C8C"/>
-                </a:solidFill>
-                <a:latin typeface="Arial"/>
-              </a:rPr>
-              <a:t/>
+            <a:off x="640080" y="2985516"/>
+            <a:ext cx="10911535" cy="731520"/>
+          </a:xfrm>
+          <a:prstGeom prst="rect">
+            <a:avLst/>
+          </a:prstGeom>
+          <a:noFill/>
+        </p:spPr>
+        <p:txBody>
+          <a:bodyPr wrap="square">
+            <a:spAutoFit/>
+          </a:bodyPr>
+          <a:lstStyle/>
+          <a:p>
+            <a:pPr algn="ctr"/>
+            <a:r>
+              <a:rPr sz="4800" b="1" i="0">
+                <a:solidFill>
+                  <a:srgbClr val="FFFFFF"/>
+                </a:solidFill>
+                <a:latin typeface="Arial"/>
+              </a:rPr>
+              <a:t>Sou encontrado por Ti</a:t>
             </a:r>
           </a:p>
         </p:txBody>
@@ -3192,29 +3192,29 @@
         </p:nvSpPr>
         <p:spPr>
           <a:xfrm>
-            <a:off x="594360" y="3529584"/>
-            <a:ext cx="11002975" cy="685800"/>
-          </a:xfrm>
-          <a:prstGeom prst="rect">
-            <a:avLst/>
-          </a:prstGeom>
-          <a:noFill/>
-        </p:spPr>
-        <p:txBody>
-          <a:bodyPr wrap="square">
-            <a:spAutoFit/>
-          </a:bodyPr>
-          <a:lstStyle/>
-          <a:p>
-            <a:pPr algn="ctr"/>
-            <a:r>
-              <a:rPr sz="4400" b="1" i="0">
-                <a:solidFill>
-                  <a:srgbClr val="FFFFFF"/>
-                </a:solidFill>
-                <a:latin typeface="Arial"/>
-              </a:rPr>
-              <a:t>Sou encontrado por Ti</a:t>
+            <a:off x="640080" y="4128516"/>
+            <a:ext cx="10911535" cy="310896"/>
+          </a:xfrm>
+          <a:prstGeom prst="rect">
+            <a:avLst/>
+          </a:prstGeom>
+          <a:noFill/>
+        </p:spPr>
+        <p:txBody>
+          <a:bodyPr wrap="square">
+            <a:spAutoFit/>
+          </a:bodyPr>
+          <a:lstStyle/>
+          <a:p>
+            <a:pPr algn="ctr"/>
+            <a:r>
+              <a:rPr sz="2000" b="0" i="0">
+                <a:solidFill>
+                  <a:srgbClr val="828282"/>
+                </a:solidFill>
+                <a:latin typeface="Arial"/>
+              </a:rPr>
+              <a:t>こんな私さえ</a:t>
             </a:r>
           </a:p>
         </p:txBody>
@@ -3227,29 +3227,29 @@
         </p:nvSpPr>
         <p:spPr>
           <a:xfrm>
-            <a:off x="594360" y="4251960"/>
-            <a:ext cx="11002975" cy="347472"/>
-          </a:xfrm>
-          <a:prstGeom prst="rect">
-            <a:avLst/>
-          </a:prstGeom>
-          <a:noFill/>
-        </p:spPr>
-        <p:txBody>
-          <a:bodyPr wrap="square">
-            <a:spAutoFit/>
-          </a:bodyPr>
-          <a:lstStyle/>
-          <a:p>
-            <a:pPr algn="ctr"/>
-            <a:r>
-              <a:rPr sz="2200" b="0" i="1">
-                <a:solidFill>
-                  <a:srgbClr val="8C8C8C"/>
-                </a:solidFill>
-                <a:latin typeface="Arial"/>
-              </a:rPr>
-              <a:t/>
+            <a:off x="640080" y="4494276"/>
+            <a:ext cx="10911535" cy="310896"/>
+          </a:xfrm>
+          <a:prstGeom prst="rect">
+            <a:avLst/>
+          </a:prstGeom>
+          <a:noFill/>
+        </p:spPr>
+        <p:txBody>
+          <a:bodyPr wrap="square">
+            <a:spAutoFit/>
+          </a:bodyPr>
+          <a:lstStyle/>
+          <a:p>
+            <a:pPr algn="ctr"/>
+            <a:r>
+              <a:rPr sz="2000" b="0" i="0">
+                <a:solidFill>
+                  <a:srgbClr val="828282"/>
+                </a:solidFill>
+                <a:latin typeface="Arial"/>
+              </a:rPr>
+              <a:t>招いた王</a:t>
             </a:r>
           </a:p>
         </p:txBody>
@@ -3288,23 +3288,23 @@
         </p:nvSpPr>
         <p:spPr>
           <a:xfrm>
-            <a:off x="594360" y="2258568"/>
-            <a:ext cx="11002975" cy="685800"/>
-          </a:xfrm>
-          <a:prstGeom prst="rect">
-            <a:avLst/>
-          </a:prstGeom>
-          <a:noFill/>
-        </p:spPr>
-        <p:txBody>
-          <a:bodyPr wrap="square">
-            <a:spAutoFit/>
-          </a:bodyPr>
-          <a:lstStyle/>
-          <a:p>
-            <a:pPr algn="ctr"/>
-            <a:r>
-              <a:rPr sz="4400" b="1" i="0">
+            <a:off x="640080" y="2052828"/>
+            <a:ext cx="10911535" cy="731520"/>
+          </a:xfrm>
+          <a:prstGeom prst="rect">
+            <a:avLst/>
+          </a:prstGeom>
+          <a:noFill/>
+        </p:spPr>
+        <p:txBody>
+          <a:bodyPr wrap="square">
+            <a:spAutoFit/>
+          </a:bodyPr>
+          <a:lstStyle/>
+          <a:p>
+            <a:pPr algn="ctr"/>
+            <a:r>
+              <a:rPr sz="4800" b="1" i="0">
                 <a:solidFill>
                   <a:srgbClr val="FFFFFF"/>
                 </a:solidFill>
@@ -3323,99 +3323,29 @@
         </p:nvSpPr>
         <p:spPr>
           <a:xfrm>
-            <a:off x="594360" y="2980944"/>
-            <a:ext cx="11002975" cy="347472"/>
-          </a:xfrm>
-          <a:prstGeom prst="rect">
-            <a:avLst/>
-          </a:prstGeom>
-          <a:noFill/>
-        </p:spPr>
-        <p:txBody>
-          <a:bodyPr wrap="square">
-            <a:spAutoFit/>
-          </a:bodyPr>
-          <a:lstStyle/>
-          <a:p>
-            <a:pPr algn="ctr"/>
-            <a:r>
-              <a:rPr sz="2200" b="0" i="1">
-                <a:solidFill>
-                  <a:srgbClr val="8C8C8C"/>
-                </a:solidFill>
-                <a:latin typeface="Arial"/>
-              </a:rPr>
-              <a:t/>
-            </a:r>
-          </a:p>
-        </p:txBody>
-      </p:sp>
-      <p:sp>
-        <p:nvSpPr>
-          <p:cNvPr id="4" name="TextBox 3"/>
-          <p:cNvSpPr txBox="1"/>
-          <p:nvPr/>
-        </p:nvSpPr>
-        <p:spPr>
-          <a:xfrm>
-            <a:off x="594360" y="3529584"/>
-            <a:ext cx="11002975" cy="685800"/>
-          </a:xfrm>
-          <a:prstGeom prst="rect">
-            <a:avLst/>
-          </a:prstGeom>
-          <a:noFill/>
-        </p:spPr>
-        <p:txBody>
-          <a:bodyPr wrap="square">
-            <a:spAutoFit/>
-          </a:bodyPr>
-          <a:lstStyle/>
-          <a:p>
-            <a:pPr algn="ctr"/>
-            <a:r>
-              <a:rPr sz="4400" b="1" i="0">
+            <a:off x="640080" y="2985516"/>
+            <a:ext cx="10911535" cy="731520"/>
+          </a:xfrm>
+          <a:prstGeom prst="rect">
+            <a:avLst/>
+          </a:prstGeom>
+          <a:noFill/>
+        </p:spPr>
+        <p:txBody>
+          <a:bodyPr wrap="square">
+            <a:spAutoFit/>
+          </a:bodyPr>
+          <a:lstStyle/>
+          <a:p>
+            <a:pPr algn="ctr"/>
+            <a:r>
+              <a:rPr sz="4800" b="1" i="0">
                 <a:solidFill>
                   <a:srgbClr val="FFFFFF"/>
                 </a:solidFill>
                 <a:latin typeface="Arial"/>
               </a:rPr>
               <a:t>Minha culpa foi apagada</a:t>
-            </a:r>
-          </a:p>
-        </p:txBody>
-      </p:sp>
-      <p:sp>
-        <p:nvSpPr>
-          <p:cNvPr id="5" name="TextBox 4"/>
-          <p:cNvSpPr txBox="1"/>
-          <p:nvPr/>
-        </p:nvSpPr>
-        <p:spPr>
-          <a:xfrm>
-            <a:off x="594360" y="4251960"/>
-            <a:ext cx="11002975" cy="347472"/>
-          </a:xfrm>
-          <a:prstGeom prst="rect">
-            <a:avLst/>
-          </a:prstGeom>
-          <a:noFill/>
-        </p:spPr>
-        <p:txBody>
-          <a:bodyPr wrap="square">
-            <a:spAutoFit/>
-          </a:bodyPr>
-          <a:lstStyle/>
-          <a:p>
-            <a:pPr algn="ctr"/>
-            <a:r>
-              <a:rPr sz="2200" b="0" i="1">
-                <a:solidFill>
-                  <a:srgbClr val="8C8C8C"/>
-                </a:solidFill>
-                <a:latin typeface="Arial"/>
-              </a:rPr>
-              <a:t/>
             </a:r>
           </a:p>
         </p:txBody>
@@ -3454,23 +3384,23 @@
         </p:nvSpPr>
         <p:spPr>
           <a:xfrm>
-            <a:off x="594360" y="2258568"/>
-            <a:ext cx="11002975" cy="685800"/>
-          </a:xfrm>
-          <a:prstGeom prst="rect">
-            <a:avLst/>
-          </a:prstGeom>
-          <a:noFill/>
-        </p:spPr>
-        <p:txBody>
-          <a:bodyPr wrap="square">
-            <a:spAutoFit/>
-          </a:bodyPr>
-          <a:lstStyle/>
-          <a:p>
-            <a:pPr algn="ctr"/>
-            <a:r>
-              <a:rPr sz="4400" b="1" i="0">
+            <a:off x="640080" y="2052828"/>
+            <a:ext cx="10911535" cy="731520"/>
+          </a:xfrm>
+          <a:prstGeom prst="rect">
+            <a:avLst/>
+          </a:prstGeom>
+          <a:noFill/>
+        </p:spPr>
+        <p:txBody>
+          <a:bodyPr wrap="square">
+            <a:spAutoFit/>
+          </a:bodyPr>
+          <a:lstStyle/>
+          <a:p>
+            <a:pPr algn="ctr"/>
+            <a:r>
+              <a:rPr sz="4800" b="1" i="0">
                 <a:solidFill>
                   <a:srgbClr val="FFFFFF"/>
                 </a:solidFill>
@@ -3489,99 +3419,29 @@
         </p:nvSpPr>
         <p:spPr>
           <a:xfrm>
-            <a:off x="594360" y="2980944"/>
-            <a:ext cx="11002975" cy="347472"/>
-          </a:xfrm>
-          <a:prstGeom prst="rect">
-            <a:avLst/>
-          </a:prstGeom>
-          <a:noFill/>
-        </p:spPr>
-        <p:txBody>
-          <a:bodyPr wrap="square">
-            <a:spAutoFit/>
-          </a:bodyPr>
-          <a:lstStyle/>
-          <a:p>
-            <a:pPr algn="ctr"/>
-            <a:r>
-              <a:rPr sz="2200" b="0" i="1">
-                <a:solidFill>
-                  <a:srgbClr val="8C8C8C"/>
-                </a:solidFill>
-                <a:latin typeface="Arial"/>
-              </a:rPr>
-              <a:t/>
-            </a:r>
-          </a:p>
-        </p:txBody>
-      </p:sp>
-      <p:sp>
-        <p:nvSpPr>
-          <p:cNvPr id="4" name="TextBox 3"/>
-          <p:cNvSpPr txBox="1"/>
-          <p:nvPr/>
-        </p:nvSpPr>
-        <p:spPr>
-          <a:xfrm>
-            <a:off x="594360" y="3529584"/>
-            <a:ext cx="11002975" cy="685800"/>
-          </a:xfrm>
-          <a:prstGeom prst="rect">
-            <a:avLst/>
-          </a:prstGeom>
-          <a:noFill/>
-        </p:spPr>
-        <p:txBody>
-          <a:bodyPr wrap="square">
-            <a:spAutoFit/>
-          </a:bodyPr>
-          <a:lstStyle/>
-          <a:p>
-            <a:pPr algn="ctr"/>
-            <a:r>
-              <a:rPr sz="4400" b="1" i="0">
+            <a:off x="640080" y="2985516"/>
+            <a:ext cx="10911535" cy="731520"/>
+          </a:xfrm>
+          <a:prstGeom prst="rect">
+            <a:avLst/>
+          </a:prstGeom>
+          <a:noFill/>
+        </p:spPr>
+        <p:txBody>
+          <a:bodyPr wrap="square">
+            <a:spAutoFit/>
+          </a:bodyPr>
+          <a:lstStyle/>
+          <a:p>
+            <a:pPr algn="ctr"/>
+            <a:r>
+              <a:rPr sz="4800" b="1" i="0">
                 <a:solidFill>
                   <a:srgbClr val="FFFFFF"/>
                 </a:solidFill>
                 <a:latin typeface="Arial"/>
               </a:rPr>
               <a:t>A cruz foi colocada</a:t>
-            </a:r>
-          </a:p>
-        </p:txBody>
-      </p:sp>
-      <p:sp>
-        <p:nvSpPr>
-          <p:cNvPr id="5" name="TextBox 4"/>
-          <p:cNvSpPr txBox="1"/>
-          <p:nvPr/>
-        </p:nvSpPr>
-        <p:spPr>
-          <a:xfrm>
-            <a:off x="594360" y="4251960"/>
-            <a:ext cx="11002975" cy="347472"/>
-          </a:xfrm>
-          <a:prstGeom prst="rect">
-            <a:avLst/>
-          </a:prstGeom>
-          <a:noFill/>
-        </p:spPr>
-        <p:txBody>
-          <a:bodyPr wrap="square">
-            <a:spAutoFit/>
-          </a:bodyPr>
-          <a:lstStyle/>
-          <a:p>
-            <a:pPr algn="ctr"/>
-            <a:r>
-              <a:rPr sz="2200" b="0" i="1">
-                <a:solidFill>
-                  <a:srgbClr val="8C8C8C"/>
-                </a:solidFill>
-                <a:latin typeface="Arial"/>
-              </a:rPr>
-              <a:t/>
             </a:r>
           </a:p>
         </p:txBody>
@@ -3620,64 +3480,29 @@
         </p:nvSpPr>
         <p:spPr>
           <a:xfrm>
-            <a:off x="594360" y="2894076"/>
-            <a:ext cx="11002975" cy="685800"/>
-          </a:xfrm>
-          <a:prstGeom prst="rect">
-            <a:avLst/>
-          </a:prstGeom>
-          <a:noFill/>
-        </p:spPr>
-        <p:txBody>
-          <a:bodyPr wrap="square">
-            <a:spAutoFit/>
-          </a:bodyPr>
-          <a:lstStyle/>
-          <a:p>
-            <a:pPr algn="ctr"/>
-            <a:r>
-              <a:rPr sz="4400" b="1" i="0">
+            <a:off x="640080" y="2702052"/>
+            <a:ext cx="10911535" cy="731520"/>
+          </a:xfrm>
+          <a:prstGeom prst="rect">
+            <a:avLst/>
+          </a:prstGeom>
+          <a:noFill/>
+        </p:spPr>
+        <p:txBody>
+          <a:bodyPr wrap="square">
+            <a:spAutoFit/>
+          </a:bodyPr>
+          <a:lstStyle/>
+          <a:p>
+            <a:pPr algn="ctr"/>
+            <a:r>
+              <a:rPr sz="4800" b="1" i="0">
                 <a:solidFill>
                   <a:srgbClr val="FFFFFF"/>
                 </a:solidFill>
                 <a:latin typeface="Arial"/>
               </a:rPr>
               <a:t>Minha culpa foi apagada</a:t>
-            </a:r>
-          </a:p>
-        </p:txBody>
-      </p:sp>
-      <p:sp>
-        <p:nvSpPr>
-          <p:cNvPr id="3" name="TextBox 2"/>
-          <p:cNvSpPr txBox="1"/>
-          <p:nvPr/>
-        </p:nvSpPr>
-        <p:spPr>
-          <a:xfrm>
-            <a:off x="594360" y="3616452"/>
-            <a:ext cx="11002975" cy="347472"/>
-          </a:xfrm>
-          <a:prstGeom prst="rect">
-            <a:avLst/>
-          </a:prstGeom>
-          <a:noFill/>
-        </p:spPr>
-        <p:txBody>
-          <a:bodyPr wrap="square">
-            <a:spAutoFit/>
-          </a:bodyPr>
-          <a:lstStyle/>
-          <a:p>
-            <a:pPr algn="ctr"/>
-            <a:r>
-              <a:rPr sz="2200" b="0" i="1">
-                <a:solidFill>
-                  <a:srgbClr val="8C8C8C"/>
-                </a:solidFill>
-                <a:latin typeface="Arial"/>
-              </a:rPr>
-              <a:t/>
             </a:r>
           </a:p>
         </p:txBody>
@@ -3716,23 +3541,23 @@
         </p:nvSpPr>
         <p:spPr>
           <a:xfrm>
-            <a:off x="594360" y="1837944"/>
-            <a:ext cx="11002975" cy="685800"/>
-          </a:xfrm>
-          <a:prstGeom prst="rect">
-            <a:avLst/>
-          </a:prstGeom>
-          <a:noFill/>
-        </p:spPr>
-        <p:txBody>
-          <a:bodyPr wrap="square">
-            <a:spAutoFit/>
-          </a:bodyPr>
-          <a:lstStyle/>
-          <a:p>
-            <a:pPr algn="ctr"/>
-            <a:r>
-              <a:rPr sz="4400" b="1" i="0">
+            <a:off x="640080" y="1650492"/>
+            <a:ext cx="10911535" cy="731520"/>
+          </a:xfrm>
+          <a:prstGeom prst="rect">
+            <a:avLst/>
+          </a:prstGeom>
+          <a:noFill/>
+        </p:spPr>
+        <p:txBody>
+          <a:bodyPr wrap="square">
+            <a:spAutoFit/>
+          </a:bodyPr>
+          <a:lstStyle/>
+          <a:p>
+            <a:pPr algn="ctr"/>
+            <a:r>
+              <a:rPr sz="4800" b="1" i="0">
                 <a:solidFill>
                   <a:srgbClr val="FFFFFF"/>
                 </a:solidFill>
@@ -3751,8 +3576,8 @@
         </p:nvSpPr>
         <p:spPr>
           <a:xfrm>
-            <a:off x="594360" y="2560320"/>
-            <a:ext cx="11002975" cy="384048"/>
+            <a:off x="640080" y="2418588"/>
+            <a:ext cx="10911535" cy="365760"/>
           </a:xfrm>
           <a:prstGeom prst="rect">
             <a:avLst/>
@@ -3769,7 +3594,7 @@
             <a:r>
               <a:rPr sz="2400" b="0" i="1">
                 <a:solidFill>
-                  <a:srgbClr val="B4B4B4"/>
+                  <a:srgbClr val="AAAAAA"/>
                 </a:solidFill>
                 <a:latin typeface="Arial"/>
               </a:rPr>
@@ -3786,8 +3611,78 @@
         </p:nvSpPr>
         <p:spPr>
           <a:xfrm>
-            <a:off x="594360" y="2980944"/>
-            <a:ext cx="11002975" cy="347472"/>
+            <a:off x="640080" y="2985516"/>
+            <a:ext cx="10911535" cy="731520"/>
+          </a:xfrm>
+          <a:prstGeom prst="rect">
+            <a:avLst/>
+          </a:prstGeom>
+          <a:noFill/>
+        </p:spPr>
+        <p:txBody>
+          <a:bodyPr wrap="square">
+            <a:spAutoFit/>
+          </a:bodyPr>
+          <a:lstStyle/>
+          <a:p>
+            <a:pPr algn="ctr"/>
+            <a:r>
+              <a:rPr sz="4800" b="1" i="0">
+                <a:solidFill>
+                  <a:srgbClr val="FFFFFF"/>
+                </a:solidFill>
+                <a:latin typeface="Arial"/>
+              </a:rPr>
+              <a:t>神の子ども Yes I am</a:t>
+            </a:r>
+          </a:p>
+        </p:txBody>
+      </p:sp>
+      <p:sp>
+        <p:nvSpPr>
+          <p:cNvPr id="5" name="TextBox 4"/>
+          <p:cNvSpPr txBox="1"/>
+          <p:nvPr/>
+        </p:nvSpPr>
+        <p:spPr>
+          <a:xfrm>
+            <a:off x="640080" y="3753612"/>
+            <a:ext cx="10911535" cy="365760"/>
+          </a:xfrm>
+          <a:prstGeom prst="rect">
+            <a:avLst/>
+          </a:prstGeom>
+          <a:noFill/>
+        </p:spPr>
+        <p:txBody>
+          <a:bodyPr wrap="square">
+            <a:spAutoFit/>
+          </a:bodyPr>
+          <a:lstStyle/>
+          <a:p>
+            <a:pPr algn="ctr"/>
+            <a:r>
+              <a:rPr sz="2400" b="0" i="1">
+                <a:solidFill>
+                  <a:srgbClr val="AAAAAA"/>
+                </a:solidFill>
+                <a:latin typeface="Arial"/>
+              </a:rPr>
+              <a:t>kaminoko domo  Yes I am</a:t>
+            </a:r>
+          </a:p>
+        </p:txBody>
+      </p:sp>
+      <p:sp>
+        <p:nvSpPr>
+          <p:cNvPr id="6" name="TextBox 5"/>
+          <p:cNvSpPr txBox="1"/>
+          <p:nvPr/>
+        </p:nvSpPr>
+        <p:spPr>
+          <a:xfrm>
+            <a:off x="640080" y="4530852"/>
+            <a:ext cx="10911535" cy="310896"/>
           </a:xfrm>
           <a:prstGeom prst="rect">
             <a:avLst/>
@@ -3804,81 +3699,11 @@
             <a:r>
               <a:rPr sz="2000" b="0" i="1">
                 <a:solidFill>
-                  <a:srgbClr val="8C8C8C"/>
-                </a:solidFill>
-                <a:latin typeface="Arial"/>
-              </a:rPr>
-              <a:t/>
-            </a:r>
-          </a:p>
-        </p:txBody>
-      </p:sp>
-      <p:sp>
-        <p:nvSpPr>
-          <p:cNvPr id="5" name="TextBox 4"/>
-          <p:cNvSpPr txBox="1"/>
-          <p:nvPr/>
-        </p:nvSpPr>
-        <p:spPr>
-          <a:xfrm>
-            <a:off x="594360" y="3529584"/>
-            <a:ext cx="11002975" cy="685800"/>
-          </a:xfrm>
-          <a:prstGeom prst="rect">
-            <a:avLst/>
-          </a:prstGeom>
-          <a:noFill/>
-        </p:spPr>
-        <p:txBody>
-          <a:bodyPr wrap="square">
-            <a:spAutoFit/>
-          </a:bodyPr>
-          <a:lstStyle/>
-          <a:p>
-            <a:pPr algn="ctr"/>
-            <a:r>
-              <a:rPr sz="4400" b="1" i="0">
-                <a:solidFill>
-                  <a:srgbClr val="FFFFFF"/>
-                </a:solidFill>
-                <a:latin typeface="Arial"/>
-              </a:rPr>
-              <a:t>神の子ども Yes I am</a:t>
-            </a:r>
-          </a:p>
-        </p:txBody>
-      </p:sp>
-      <p:sp>
-        <p:nvSpPr>
-          <p:cNvPr id="6" name="TextBox 5"/>
-          <p:cNvSpPr txBox="1"/>
-          <p:nvPr/>
-        </p:nvSpPr>
-        <p:spPr>
-          <a:xfrm>
-            <a:off x="594360" y="4251960"/>
-            <a:ext cx="11002975" cy="384048"/>
-          </a:xfrm>
-          <a:prstGeom prst="rect">
-            <a:avLst/>
-          </a:prstGeom>
-          <a:noFill/>
-        </p:spPr>
-        <p:txBody>
-          <a:bodyPr wrap="square">
-            <a:spAutoFit/>
-          </a:bodyPr>
-          <a:lstStyle/>
-          <a:p>
-            <a:pPr algn="ctr"/>
-            <a:r>
-              <a:rPr sz="2400" b="0" i="1">
-                <a:solidFill>
-                  <a:srgbClr val="B4B4B4"/>
-                </a:solidFill>
-                <a:latin typeface="Arial"/>
-              </a:rPr>
-              <a:t>kaminoko domo  Yes I am</a:t>
+                  <a:srgbClr val="828282"/>
+                </a:solidFill>
+                <a:latin typeface="Arial"/>
+              </a:rPr>
+              <a:t>Sou filho de Deus</a:t>
             </a:r>
           </a:p>
         </p:txBody>
@@ -3891,8 +3716,8 @@
         </p:nvSpPr>
         <p:spPr>
           <a:xfrm>
-            <a:off x="594360" y="4672584"/>
-            <a:ext cx="11002975" cy="347472"/>
+            <a:off x="640080" y="4896612"/>
+            <a:ext cx="10911535" cy="310896"/>
           </a:xfrm>
           <a:prstGeom prst="rect">
             <a:avLst/>
@@ -3909,11 +3734,11 @@
             <a:r>
               <a:rPr sz="2000" b="0" i="1">
                 <a:solidFill>
-                  <a:srgbClr val="8C8C8C"/>
-                </a:solidFill>
-                <a:latin typeface="Arial"/>
-              </a:rPr>
-              <a:t/>
+                  <a:srgbClr val="828282"/>
+                </a:solidFill>
+                <a:latin typeface="Arial"/>
+              </a:rPr>
+              <a:t>Não mais escravo do medo</a:t>
             </a:r>
           </a:p>
         </p:txBody>
@@ -3952,23 +3777,23 @@
         </p:nvSpPr>
         <p:spPr>
           <a:xfrm>
-            <a:off x="594360" y="1837944"/>
-            <a:ext cx="11002975" cy="685800"/>
-          </a:xfrm>
-          <a:prstGeom prst="rect">
-            <a:avLst/>
-          </a:prstGeom>
-          <a:noFill/>
-        </p:spPr>
-        <p:txBody>
-          <a:bodyPr wrap="square">
-            <a:spAutoFit/>
-          </a:bodyPr>
-          <a:lstStyle/>
-          <a:p>
-            <a:pPr algn="ctr"/>
-            <a:r>
-              <a:rPr sz="4400" b="1" i="0">
+            <a:off x="640080" y="1650492"/>
+            <a:ext cx="10911535" cy="731520"/>
+          </a:xfrm>
+          <a:prstGeom prst="rect">
+            <a:avLst/>
+          </a:prstGeom>
+          <a:noFill/>
+        </p:spPr>
+        <p:txBody>
+          <a:bodyPr wrap="square">
+            <a:spAutoFit/>
+          </a:bodyPr>
+          <a:lstStyle/>
+          <a:p>
+            <a:pPr algn="ctr"/>
+            <a:r>
+              <a:rPr sz="4800" b="1" i="0">
                 <a:solidFill>
                   <a:srgbClr val="FFFFFF"/>
                 </a:solidFill>
@@ -3987,8 +3812,8 @@
         </p:nvSpPr>
         <p:spPr>
           <a:xfrm>
-            <a:off x="594360" y="2560320"/>
-            <a:ext cx="11002975" cy="384048"/>
+            <a:off x="640080" y="2418588"/>
+            <a:ext cx="10911535" cy="365760"/>
           </a:xfrm>
           <a:prstGeom prst="rect">
             <a:avLst/>
@@ -4005,7 +3830,7 @@
             <a:r>
               <a:rPr sz="2400" b="0" i="1">
                 <a:solidFill>
-                  <a:srgbClr val="B4B4B4"/>
+                  <a:srgbClr val="AAAAAA"/>
                 </a:solidFill>
                 <a:latin typeface="Arial"/>
               </a:rPr>
@@ -4022,8 +3847,78 @@
         </p:nvSpPr>
         <p:spPr>
           <a:xfrm>
-            <a:off x="594360" y="2980944"/>
-            <a:ext cx="11002975" cy="347472"/>
+            <a:off x="640080" y="2985516"/>
+            <a:ext cx="10911535" cy="731520"/>
+          </a:xfrm>
+          <a:prstGeom prst="rect">
+            <a:avLst/>
+          </a:prstGeom>
+          <a:noFill/>
+        </p:spPr>
+        <p:txBody>
+          <a:bodyPr wrap="square">
+            <a:spAutoFit/>
+          </a:bodyPr>
+          <a:lstStyle/>
+          <a:p>
+            <a:pPr algn="ctr"/>
+            <a:r>
+              <a:rPr sz="4800" b="1" i="0">
+                <a:solidFill>
+                  <a:srgbClr val="FFFFFF"/>
+                </a:solidFill>
+                <a:latin typeface="Arial"/>
+              </a:rPr>
+              <a:t>神の子ども  Yes I am</a:t>
+            </a:r>
+          </a:p>
+        </p:txBody>
+      </p:sp>
+      <p:sp>
+        <p:nvSpPr>
+          <p:cNvPr id="5" name="TextBox 4"/>
+          <p:cNvSpPr txBox="1"/>
+          <p:nvPr/>
+        </p:nvSpPr>
+        <p:spPr>
+          <a:xfrm>
+            <a:off x="640080" y="3753612"/>
+            <a:ext cx="10911535" cy="365760"/>
+          </a:xfrm>
+          <a:prstGeom prst="rect">
+            <a:avLst/>
+          </a:prstGeom>
+          <a:noFill/>
+        </p:spPr>
+        <p:txBody>
+          <a:bodyPr wrap="square">
+            <a:spAutoFit/>
+          </a:bodyPr>
+          <a:lstStyle/>
+          <a:p>
+            <a:pPr algn="ctr"/>
+            <a:r>
+              <a:rPr sz="2400" b="0" i="1">
+                <a:solidFill>
+                  <a:srgbClr val="AAAAAA"/>
+                </a:solidFill>
+                <a:latin typeface="Arial"/>
+              </a:rPr>
+              <a:t>kami no kodomo Yes I am</a:t>
+            </a:r>
+          </a:p>
+        </p:txBody>
+      </p:sp>
+      <p:sp>
+        <p:nvSpPr>
+          <p:cNvPr id="6" name="TextBox 5"/>
+          <p:cNvSpPr txBox="1"/>
+          <p:nvPr/>
+        </p:nvSpPr>
+        <p:spPr>
+          <a:xfrm>
+            <a:off x="640080" y="4530852"/>
+            <a:ext cx="10911535" cy="310896"/>
           </a:xfrm>
           <a:prstGeom prst="rect">
             <a:avLst/>
@@ -4040,81 +3935,11 @@
             <a:r>
               <a:rPr sz="2000" b="0" i="1">
                 <a:solidFill>
-                  <a:srgbClr val="8C8C8C"/>
-                </a:solidFill>
-                <a:latin typeface="Arial"/>
-              </a:rPr>
-              <a:t/>
-            </a:r>
-          </a:p>
-        </p:txBody>
-      </p:sp>
-      <p:sp>
-        <p:nvSpPr>
-          <p:cNvPr id="5" name="TextBox 4"/>
-          <p:cNvSpPr txBox="1"/>
-          <p:nvPr/>
-        </p:nvSpPr>
-        <p:spPr>
-          <a:xfrm>
-            <a:off x="594360" y="3529584"/>
-            <a:ext cx="11002975" cy="685800"/>
-          </a:xfrm>
-          <a:prstGeom prst="rect">
-            <a:avLst/>
-          </a:prstGeom>
-          <a:noFill/>
-        </p:spPr>
-        <p:txBody>
-          <a:bodyPr wrap="square">
-            <a:spAutoFit/>
-          </a:bodyPr>
-          <a:lstStyle/>
-          <a:p>
-            <a:pPr algn="ctr"/>
-            <a:r>
-              <a:rPr sz="4400" b="1" i="0">
-                <a:solidFill>
-                  <a:srgbClr val="FFFFFF"/>
-                </a:solidFill>
-                <a:latin typeface="Arial"/>
-              </a:rPr>
-              <a:t>神の子ども  Yes I am</a:t>
-            </a:r>
-          </a:p>
-        </p:txBody>
-      </p:sp>
-      <p:sp>
-        <p:nvSpPr>
-          <p:cNvPr id="6" name="TextBox 5"/>
-          <p:cNvSpPr txBox="1"/>
-          <p:nvPr/>
-        </p:nvSpPr>
-        <p:spPr>
-          <a:xfrm>
-            <a:off x="594360" y="4251960"/>
-            <a:ext cx="11002975" cy="384048"/>
-          </a:xfrm>
-          <a:prstGeom prst="rect">
-            <a:avLst/>
-          </a:prstGeom>
-          <a:noFill/>
-        </p:spPr>
-        <p:txBody>
-          <a:bodyPr wrap="square">
-            <a:spAutoFit/>
-          </a:bodyPr>
-          <a:lstStyle/>
-          <a:p>
-            <a:pPr algn="ctr"/>
-            <a:r>
-              <a:rPr sz="2400" b="0" i="1">
-                <a:solidFill>
-                  <a:srgbClr val="B4B4B4"/>
-                </a:solidFill>
-                <a:latin typeface="Arial"/>
-              </a:rPr>
-              <a:t>kami no kodomo Yes I am</a:t>
+                  <a:srgbClr val="828282"/>
+                </a:solidFill>
+                <a:latin typeface="Arial"/>
+              </a:rPr>
+              <a:t>Sou filho de Deus</a:t>
             </a:r>
           </a:p>
         </p:txBody>
@@ -4127,8 +3952,8 @@
         </p:nvSpPr>
         <p:spPr>
           <a:xfrm>
-            <a:off x="594360" y="4672584"/>
-            <a:ext cx="11002975" cy="347472"/>
+            <a:off x="640080" y="4896612"/>
+            <a:ext cx="10911535" cy="310896"/>
           </a:xfrm>
           <a:prstGeom prst="rect">
             <a:avLst/>
@@ -4145,11 +3970,11 @@
             <a:r>
               <a:rPr sz="2000" b="0" i="1">
                 <a:solidFill>
-                  <a:srgbClr val="8C8C8C"/>
-                </a:solidFill>
-                <a:latin typeface="Arial"/>
-              </a:rPr>
-              <a:t/>
+                  <a:srgbClr val="828282"/>
+                </a:solidFill>
+                <a:latin typeface="Arial"/>
+              </a:rPr>
+              <a:t>No lugar de dor e de vergonha</a:t>
             </a:r>
           </a:p>
         </p:txBody>
@@ -4188,23 +4013,23 @@
         </p:nvSpPr>
         <p:spPr>
           <a:xfrm>
-            <a:off x="594360" y="1837944"/>
-            <a:ext cx="11002975" cy="685800"/>
-          </a:xfrm>
-          <a:prstGeom prst="rect">
-            <a:avLst/>
-          </a:prstGeom>
-          <a:noFill/>
-        </p:spPr>
-        <p:txBody>
-          <a:bodyPr wrap="square">
-            <a:spAutoFit/>
-          </a:bodyPr>
-          <a:lstStyle/>
-          <a:p>
-            <a:pPr algn="ctr"/>
-            <a:r>
-              <a:rPr sz="4400" b="1" i="0">
+            <a:off x="640080" y="1650492"/>
+            <a:ext cx="10911535" cy="731520"/>
+          </a:xfrm>
+          <a:prstGeom prst="rect">
+            <a:avLst/>
+          </a:prstGeom>
+          <a:noFill/>
+        </p:spPr>
+        <p:txBody>
+          <a:bodyPr wrap="square">
+            <a:spAutoFit/>
+          </a:bodyPr>
+          <a:lstStyle/>
+          <a:p>
+            <a:pPr algn="ctr"/>
+            <a:r>
+              <a:rPr sz="4800" b="1" i="0">
                 <a:solidFill>
                   <a:srgbClr val="FFFFFF"/>
                 </a:solidFill>
@@ -4223,8 +4048,8 @@
         </p:nvSpPr>
         <p:spPr>
           <a:xfrm>
-            <a:off x="594360" y="2560320"/>
-            <a:ext cx="11002975" cy="384048"/>
+            <a:off x="640080" y="2418588"/>
+            <a:ext cx="10911535" cy="365760"/>
           </a:xfrm>
           <a:prstGeom prst="rect">
             <a:avLst/>
@@ -4241,7 +4066,7 @@
             <a:r>
               <a:rPr sz="2400" b="0" i="1">
                 <a:solidFill>
-                  <a:srgbClr val="B4B4B4"/>
+                  <a:srgbClr val="AAAAAA"/>
                 </a:solidFill>
                 <a:latin typeface="Arial"/>
               </a:rPr>
@@ -4258,29 +4083,29 @@
         </p:nvSpPr>
         <p:spPr>
           <a:xfrm>
-            <a:off x="594360" y="2980944"/>
-            <a:ext cx="11002975" cy="347472"/>
-          </a:xfrm>
-          <a:prstGeom prst="rect">
-            <a:avLst/>
-          </a:prstGeom>
-          <a:noFill/>
-        </p:spPr>
-        <p:txBody>
-          <a:bodyPr wrap="square">
-            <a:spAutoFit/>
-          </a:bodyPr>
-          <a:lstStyle/>
-          <a:p>
-            <a:pPr algn="ctr"/>
-            <a:r>
-              <a:rPr sz="2000" b="0" i="1">
-                <a:solidFill>
-                  <a:srgbClr val="8C8C8C"/>
-                </a:solidFill>
-                <a:latin typeface="Arial"/>
-              </a:rPr>
-              <a:t/>
+            <a:off x="640080" y="2985516"/>
+            <a:ext cx="10911535" cy="731520"/>
+          </a:xfrm>
+          <a:prstGeom prst="rect">
+            <a:avLst/>
+          </a:prstGeom>
+          <a:noFill/>
+        </p:spPr>
+        <p:txBody>
+          <a:bodyPr wrap="square">
+            <a:spAutoFit/>
+          </a:bodyPr>
+          <a:lstStyle/>
+          <a:p>
+            <a:pPr algn="ctr"/>
+            <a:r>
+              <a:rPr sz="4800" b="1" i="0">
+                <a:solidFill>
+                  <a:srgbClr val="FFFFFF"/>
+                </a:solidFill>
+                <a:latin typeface="Arial"/>
+              </a:rPr>
+              <a:t>言われた通り</a:t>
             </a:r>
           </a:p>
         </p:txBody>
@@ -4293,43 +4118,8 @@
         </p:nvSpPr>
         <p:spPr>
           <a:xfrm>
-            <a:off x="594360" y="3529584"/>
-            <a:ext cx="11002975" cy="685800"/>
-          </a:xfrm>
-          <a:prstGeom prst="rect">
-            <a:avLst/>
-          </a:prstGeom>
-          <a:noFill/>
-        </p:spPr>
-        <p:txBody>
-          <a:bodyPr wrap="square">
-            <a:spAutoFit/>
-          </a:bodyPr>
-          <a:lstStyle/>
-          <a:p>
-            <a:pPr algn="ctr"/>
-            <a:r>
-              <a:rPr sz="4400" b="1" i="0">
-                <a:solidFill>
-                  <a:srgbClr val="FFFFFF"/>
-                </a:solidFill>
-                <a:latin typeface="Arial"/>
-              </a:rPr>
-              <a:t>言われた通り</a:t>
-            </a:r>
-          </a:p>
-        </p:txBody>
-      </p:sp>
-      <p:sp>
-        <p:nvSpPr>
-          <p:cNvPr id="6" name="TextBox 5"/>
-          <p:cNvSpPr txBox="1"/>
-          <p:nvPr/>
-        </p:nvSpPr>
-        <p:spPr>
-          <a:xfrm>
-            <a:off x="594360" y="4251960"/>
-            <a:ext cx="11002975" cy="384048"/>
+            <a:off x="640080" y="3753612"/>
+            <a:ext cx="10911535" cy="365760"/>
           </a:xfrm>
           <a:prstGeom prst="rect">
             <a:avLst/>
@@ -4346,46 +4136,11 @@
             <a:r>
               <a:rPr sz="2400" b="0" i="1">
                 <a:solidFill>
-                  <a:srgbClr val="B4B4B4"/>
+                  <a:srgbClr val="AAAAAA"/>
                 </a:solidFill>
                 <a:latin typeface="Arial"/>
               </a:rPr>
               <a:t>iwareta toori</a:t>
-            </a:r>
-          </a:p>
-        </p:txBody>
-      </p:sp>
-      <p:sp>
-        <p:nvSpPr>
-          <p:cNvPr id="7" name="TextBox 6"/>
-          <p:cNvSpPr txBox="1"/>
-          <p:nvPr/>
-        </p:nvSpPr>
-        <p:spPr>
-          <a:xfrm>
-            <a:off x="594360" y="4672584"/>
-            <a:ext cx="11002975" cy="347472"/>
-          </a:xfrm>
-          <a:prstGeom prst="rect">
-            <a:avLst/>
-          </a:prstGeom>
-          <a:noFill/>
-        </p:spPr>
-        <p:txBody>
-          <a:bodyPr wrap="square">
-            <a:spAutoFit/>
-          </a:bodyPr>
-          <a:lstStyle/>
-          <a:p>
-            <a:pPr algn="ctr"/>
-            <a:r>
-              <a:rPr sz="2000" b="0" i="1">
-                <a:solidFill>
-                  <a:srgbClr val="8C8C8C"/>
-                </a:solidFill>
-                <a:latin typeface="Arial"/>
-              </a:rPr>
-              <a:t/>
             </a:r>
           </a:p>
         </p:txBody>
@@ -4424,23 +4179,23 @@
         </p:nvSpPr>
         <p:spPr>
           <a:xfrm>
-            <a:off x="594360" y="1837944"/>
-            <a:ext cx="11002975" cy="685800"/>
-          </a:xfrm>
-          <a:prstGeom prst="rect">
-            <a:avLst/>
-          </a:prstGeom>
-          <a:noFill/>
-        </p:spPr>
-        <p:txBody>
-          <a:bodyPr wrap="square">
-            <a:spAutoFit/>
-          </a:bodyPr>
-          <a:lstStyle/>
-          <a:p>
-            <a:pPr algn="ctr"/>
-            <a:r>
-              <a:rPr sz="4400" b="1" i="0">
+            <a:off x="640080" y="1650492"/>
+            <a:ext cx="10911535" cy="731520"/>
+          </a:xfrm>
+          <a:prstGeom prst="rect">
+            <a:avLst/>
+          </a:prstGeom>
+          <a:noFill/>
+        </p:spPr>
+        <p:txBody>
+          <a:bodyPr wrap="square">
+            <a:spAutoFit/>
+          </a:bodyPr>
+          <a:lstStyle/>
+          <a:p>
+            <a:pPr algn="ctr"/>
+            <a:r>
+              <a:rPr sz="4800" b="1" i="0">
                 <a:solidFill>
                   <a:srgbClr val="FFFFFF"/>
                 </a:solidFill>
@@ -4459,8 +4214,8 @@
         </p:nvSpPr>
         <p:spPr>
           <a:xfrm>
-            <a:off x="594360" y="2560320"/>
-            <a:ext cx="11002975" cy="384048"/>
+            <a:off x="640080" y="2418588"/>
+            <a:ext cx="10911535" cy="365760"/>
           </a:xfrm>
           <a:prstGeom prst="rect">
             <a:avLst/>
@@ -4477,7 +4232,7 @@
             <a:r>
               <a:rPr sz="2400" b="0" i="1">
                 <a:solidFill>
-                  <a:srgbClr val="B4B4B4"/>
+                  <a:srgbClr val="AAAAAA"/>
                 </a:solidFill>
                 <a:latin typeface="Arial"/>
               </a:rPr>
@@ -4494,29 +4249,29 @@
         </p:nvSpPr>
         <p:spPr>
           <a:xfrm>
-            <a:off x="594360" y="2980944"/>
-            <a:ext cx="11002975" cy="347472"/>
-          </a:xfrm>
-          <a:prstGeom prst="rect">
-            <a:avLst/>
-          </a:prstGeom>
-          <a:noFill/>
-        </p:spPr>
-        <p:txBody>
-          <a:bodyPr wrap="square">
-            <a:spAutoFit/>
-          </a:bodyPr>
-          <a:lstStyle/>
-          <a:p>
-            <a:pPr algn="ctr"/>
-            <a:r>
-              <a:rPr sz="2000" b="0" i="1">
-                <a:solidFill>
-                  <a:srgbClr val="8C8C8C"/>
-                </a:solidFill>
-                <a:latin typeface="Arial"/>
-              </a:rPr>
-              <a:t/>
+            <a:off x="640080" y="2985516"/>
+            <a:ext cx="10911535" cy="731520"/>
+          </a:xfrm>
+          <a:prstGeom prst="rect">
+            <a:avLst/>
+          </a:prstGeom>
+          <a:noFill/>
+        </p:spPr>
+        <p:txBody>
+          <a:bodyPr wrap="square">
+            <a:spAutoFit/>
+          </a:bodyPr>
+          <a:lstStyle/>
+          <a:p>
+            <a:pPr algn="ctr"/>
+            <a:r>
+              <a:rPr sz="4800" b="1" i="0">
+                <a:solidFill>
+                  <a:srgbClr val="FFFFFF"/>
+                </a:solidFill>
+                <a:latin typeface="Arial"/>
+              </a:rPr>
+              <a:t>本当の自分を</a:t>
             </a:r>
           </a:p>
         </p:txBody>
@@ -4529,43 +4284,8 @@
         </p:nvSpPr>
         <p:spPr>
           <a:xfrm>
-            <a:off x="594360" y="3529584"/>
-            <a:ext cx="11002975" cy="685800"/>
-          </a:xfrm>
-          <a:prstGeom prst="rect">
-            <a:avLst/>
-          </a:prstGeom>
-          <a:noFill/>
-        </p:spPr>
-        <p:txBody>
-          <a:bodyPr wrap="square">
-            <a:spAutoFit/>
-          </a:bodyPr>
-          <a:lstStyle/>
-          <a:p>
-            <a:pPr algn="ctr"/>
-            <a:r>
-              <a:rPr sz="4400" b="1" i="0">
-                <a:solidFill>
-                  <a:srgbClr val="FFFFFF"/>
-                </a:solidFill>
-                <a:latin typeface="Arial"/>
-              </a:rPr>
-              <a:t>本当の自分を</a:t>
-            </a:r>
-          </a:p>
-        </p:txBody>
-      </p:sp>
-      <p:sp>
-        <p:nvSpPr>
-          <p:cNvPr id="6" name="TextBox 5"/>
-          <p:cNvSpPr txBox="1"/>
-          <p:nvPr/>
-        </p:nvSpPr>
-        <p:spPr>
-          <a:xfrm>
-            <a:off x="594360" y="4251960"/>
-            <a:ext cx="11002975" cy="384048"/>
+            <a:off x="640080" y="3753612"/>
+            <a:ext cx="10911535" cy="365760"/>
           </a:xfrm>
           <a:prstGeom prst="rect">
             <a:avLst/>
@@ -4582,46 +4302,11 @@
             <a:r>
               <a:rPr sz="2400" b="0" i="1">
                 <a:solidFill>
-                  <a:srgbClr val="B4B4B4"/>
+                  <a:srgbClr val="AAAAAA"/>
                 </a:solidFill>
                 <a:latin typeface="Arial"/>
               </a:rPr>
               <a:t>honto no jibun wo</a:t>
-            </a:r>
-          </a:p>
-        </p:txBody>
-      </p:sp>
-      <p:sp>
-        <p:nvSpPr>
-          <p:cNvPr id="7" name="TextBox 6"/>
-          <p:cNvSpPr txBox="1"/>
-          <p:nvPr/>
-        </p:nvSpPr>
-        <p:spPr>
-          <a:xfrm>
-            <a:off x="594360" y="4672584"/>
-            <a:ext cx="11002975" cy="347472"/>
-          </a:xfrm>
-          <a:prstGeom prst="rect">
-            <a:avLst/>
-          </a:prstGeom>
-          <a:noFill/>
-        </p:spPr>
-        <p:txBody>
-          <a:bodyPr wrap="square">
-            <a:spAutoFit/>
-          </a:bodyPr>
-          <a:lstStyle/>
-          <a:p>
-            <a:pPr algn="ctr"/>
-            <a:r>
-              <a:rPr sz="2000" b="0" i="1">
-                <a:solidFill>
-                  <a:srgbClr val="8C8C8C"/>
-                </a:solidFill>
-                <a:latin typeface="Arial"/>
-              </a:rPr>
-              <a:t/>
             </a:r>
           </a:p>
         </p:txBody>
@@ -4660,23 +4345,23 @@
         </p:nvSpPr>
         <p:spPr>
           <a:xfrm>
-            <a:off x="594360" y="1837944"/>
-            <a:ext cx="11002975" cy="685800"/>
-          </a:xfrm>
-          <a:prstGeom prst="rect">
-            <a:avLst/>
-          </a:prstGeom>
-          <a:noFill/>
-        </p:spPr>
-        <p:txBody>
-          <a:bodyPr wrap="square">
-            <a:spAutoFit/>
-          </a:bodyPr>
-          <a:lstStyle/>
-          <a:p>
-            <a:pPr algn="ctr"/>
-            <a:r>
-              <a:rPr sz="4400" b="1" i="0">
+            <a:off x="640080" y="1650492"/>
+            <a:ext cx="10911535" cy="731520"/>
+          </a:xfrm>
+          <a:prstGeom prst="rect">
+            <a:avLst/>
+          </a:prstGeom>
+          <a:noFill/>
+        </p:spPr>
+        <p:txBody>
+          <a:bodyPr wrap="square">
+            <a:spAutoFit/>
+          </a:bodyPr>
+          <a:lstStyle/>
+          <a:p>
+            <a:pPr algn="ctr"/>
+            <a:r>
+              <a:rPr sz="4800" b="1" i="0">
                 <a:solidFill>
                   <a:srgbClr val="FFFFFF"/>
                 </a:solidFill>
@@ -4695,8 +4380,8 @@
         </p:nvSpPr>
         <p:spPr>
           <a:xfrm>
-            <a:off x="594360" y="2560320"/>
-            <a:ext cx="11002975" cy="384048"/>
+            <a:off x="640080" y="2418588"/>
+            <a:ext cx="10911535" cy="365760"/>
           </a:xfrm>
           <a:prstGeom prst="rect">
             <a:avLst/>
@@ -4713,7 +4398,7 @@
             <a:r>
               <a:rPr sz="2400" b="0" i="1">
                 <a:solidFill>
-                  <a:srgbClr val="B4B4B4"/>
+                  <a:srgbClr val="AAAAAA"/>
                 </a:solidFill>
                 <a:latin typeface="Arial"/>
               </a:rPr>
@@ -4730,29 +4415,29 @@
         </p:nvSpPr>
         <p:spPr>
           <a:xfrm>
-            <a:off x="594360" y="2980944"/>
-            <a:ext cx="11002975" cy="347472"/>
-          </a:xfrm>
-          <a:prstGeom prst="rect">
-            <a:avLst/>
-          </a:prstGeom>
-          <a:noFill/>
-        </p:spPr>
-        <p:txBody>
-          <a:bodyPr wrap="square">
-            <a:spAutoFit/>
-          </a:bodyPr>
-          <a:lstStyle/>
-          <a:p>
-            <a:pPr algn="ctr"/>
-            <a:r>
-              <a:rPr sz="2000" b="0" i="1">
-                <a:solidFill>
-                  <a:srgbClr val="8C8C8C"/>
-                </a:solidFill>
-                <a:latin typeface="Arial"/>
-              </a:rPr>
-              <a:t/>
+            <a:off x="640080" y="2985516"/>
+            <a:ext cx="10911535" cy="731520"/>
+          </a:xfrm>
+          <a:prstGeom prst="rect">
+            <a:avLst/>
+          </a:prstGeom>
+          <a:noFill/>
+        </p:spPr>
+        <p:txBody>
+          <a:bodyPr wrap="square">
+            <a:spAutoFit/>
+          </a:bodyPr>
+          <a:lstStyle/>
+          <a:p>
+            <a:pPr algn="ctr"/>
+            <a:r>
+              <a:rPr sz="4800" b="1" i="0">
+                <a:solidFill>
+                  <a:srgbClr val="FFFFFF"/>
+                </a:solidFill>
+                <a:latin typeface="Arial"/>
+              </a:rPr>
+              <a:t>言われた通り</a:t>
             </a:r>
           </a:p>
         </p:txBody>
@@ -4765,43 +4450,8 @@
         </p:nvSpPr>
         <p:spPr>
           <a:xfrm>
-            <a:off x="594360" y="3529584"/>
-            <a:ext cx="11002975" cy="685800"/>
-          </a:xfrm>
-          <a:prstGeom prst="rect">
-            <a:avLst/>
-          </a:prstGeom>
-          <a:noFill/>
-        </p:spPr>
-        <p:txBody>
-          <a:bodyPr wrap="square">
-            <a:spAutoFit/>
-          </a:bodyPr>
-          <a:lstStyle/>
-          <a:p>
-            <a:pPr algn="ctr"/>
-            <a:r>
-              <a:rPr sz="4400" b="1" i="0">
-                <a:solidFill>
-                  <a:srgbClr val="FFFFFF"/>
-                </a:solidFill>
-                <a:latin typeface="Arial"/>
-              </a:rPr>
-              <a:t>言われた通り</a:t>
-            </a:r>
-          </a:p>
-        </p:txBody>
-      </p:sp>
-      <p:sp>
-        <p:nvSpPr>
-          <p:cNvPr id="6" name="TextBox 5"/>
-          <p:cNvSpPr txBox="1"/>
-          <p:nvPr/>
-        </p:nvSpPr>
-        <p:spPr>
-          <a:xfrm>
-            <a:off x="594360" y="4251960"/>
-            <a:ext cx="11002975" cy="384048"/>
+            <a:off x="640080" y="3753612"/>
+            <a:ext cx="10911535" cy="365760"/>
           </a:xfrm>
           <a:prstGeom prst="rect">
             <a:avLst/>
@@ -4818,46 +4468,11 @@
             <a:r>
               <a:rPr sz="2400" b="0" i="1">
                 <a:solidFill>
-                  <a:srgbClr val="B4B4B4"/>
+                  <a:srgbClr val="AAAAAA"/>
                 </a:solidFill>
                 <a:latin typeface="Arial"/>
               </a:rPr>
               <a:t>iwareta toori</a:t>
-            </a:r>
-          </a:p>
-        </p:txBody>
-      </p:sp>
-      <p:sp>
-        <p:nvSpPr>
-          <p:cNvPr id="7" name="TextBox 6"/>
-          <p:cNvSpPr txBox="1"/>
-          <p:nvPr/>
-        </p:nvSpPr>
-        <p:spPr>
-          <a:xfrm>
-            <a:off x="594360" y="4672584"/>
-            <a:ext cx="11002975" cy="347472"/>
-          </a:xfrm>
-          <a:prstGeom prst="rect">
-            <a:avLst/>
-          </a:prstGeom>
-          <a:noFill/>
-        </p:spPr>
-        <p:txBody>
-          <a:bodyPr wrap="square">
-            <a:spAutoFit/>
-          </a:bodyPr>
-          <a:lstStyle/>
-          <a:p>
-            <a:pPr algn="ctr"/>
-            <a:r>
-              <a:rPr sz="2000" b="0" i="1">
-                <a:solidFill>
-                  <a:srgbClr val="8C8C8C"/>
-                </a:solidFill>
-                <a:latin typeface="Arial"/>
-              </a:rPr>
-              <a:t/>
             </a:r>
           </a:p>
         </p:txBody>
@@ -4896,23 +4511,23 @@
         </p:nvSpPr>
         <p:spPr>
           <a:xfrm>
-            <a:off x="594360" y="1837944"/>
-            <a:ext cx="11002975" cy="685800"/>
-          </a:xfrm>
-          <a:prstGeom prst="rect">
-            <a:avLst/>
-          </a:prstGeom>
-          <a:noFill/>
-        </p:spPr>
-        <p:txBody>
-          <a:bodyPr wrap="square">
-            <a:spAutoFit/>
-          </a:bodyPr>
-          <a:lstStyle/>
-          <a:p>
-            <a:pPr algn="ctr"/>
-            <a:r>
-              <a:rPr sz="4400" b="1" i="0">
+            <a:off x="640080" y="1650492"/>
+            <a:ext cx="10911535" cy="731520"/>
+          </a:xfrm>
+          <a:prstGeom prst="rect">
+            <a:avLst/>
+          </a:prstGeom>
+          <a:noFill/>
+        </p:spPr>
+        <p:txBody>
+          <a:bodyPr wrap="square">
+            <a:spAutoFit/>
+          </a:bodyPr>
+          <a:lstStyle/>
+          <a:p>
+            <a:pPr algn="ctr"/>
+            <a:r>
+              <a:rPr sz="4800" b="1" i="0">
                 <a:solidFill>
                   <a:srgbClr val="FFFFFF"/>
                 </a:solidFill>
@@ -4931,8 +4546,8 @@
         </p:nvSpPr>
         <p:spPr>
           <a:xfrm>
-            <a:off x="594360" y="2560320"/>
-            <a:ext cx="11002975" cy="384048"/>
+            <a:off x="640080" y="2418588"/>
+            <a:ext cx="10911535" cy="365760"/>
           </a:xfrm>
           <a:prstGeom prst="rect">
             <a:avLst/>
@@ -4949,7 +4564,7 @@
             <a:r>
               <a:rPr sz="2400" b="0" i="1">
                 <a:solidFill>
-                  <a:srgbClr val="B4B4B4"/>
+                  <a:srgbClr val="AAAAAA"/>
                 </a:solidFill>
                 <a:latin typeface="Arial"/>
               </a:rPr>
@@ -4966,29 +4581,29 @@
         </p:nvSpPr>
         <p:spPr>
           <a:xfrm>
-            <a:off x="594360" y="2980944"/>
-            <a:ext cx="11002975" cy="347472"/>
-          </a:xfrm>
-          <a:prstGeom prst="rect">
-            <a:avLst/>
-          </a:prstGeom>
-          <a:noFill/>
-        </p:spPr>
-        <p:txBody>
-          <a:bodyPr wrap="square">
-            <a:spAutoFit/>
-          </a:bodyPr>
-          <a:lstStyle/>
-          <a:p>
-            <a:pPr algn="ctr"/>
-            <a:r>
-              <a:rPr sz="2000" b="0" i="1">
-                <a:solidFill>
-                  <a:srgbClr val="8C8C8C"/>
-                </a:solidFill>
-                <a:latin typeface="Arial"/>
-              </a:rPr>
-              <a:t/>
+            <a:off x="640080" y="2985516"/>
+            <a:ext cx="10911535" cy="731520"/>
+          </a:xfrm>
+          <a:prstGeom prst="rect">
+            <a:avLst/>
+          </a:prstGeom>
+          <a:noFill/>
+        </p:spPr>
+        <p:txBody>
+          <a:bodyPr wrap="square">
+            <a:spAutoFit/>
+          </a:bodyPr>
+          <a:lstStyle/>
+          <a:p>
+            <a:pPr algn="ctr"/>
+            <a:r>
+              <a:rPr sz="4800" b="1" i="0">
+                <a:solidFill>
+                  <a:srgbClr val="FFFFFF"/>
+                </a:solidFill>
+                <a:latin typeface="Arial"/>
+              </a:rPr>
+              <a:t>本当の自分を</a:t>
             </a:r>
           </a:p>
         </p:txBody>
@@ -5001,43 +4616,8 @@
         </p:nvSpPr>
         <p:spPr>
           <a:xfrm>
-            <a:off x="594360" y="3529584"/>
-            <a:ext cx="11002975" cy="685800"/>
-          </a:xfrm>
-          <a:prstGeom prst="rect">
-            <a:avLst/>
-          </a:prstGeom>
-          <a:noFill/>
-        </p:spPr>
-        <p:txBody>
-          <a:bodyPr wrap="square">
-            <a:spAutoFit/>
-          </a:bodyPr>
-          <a:lstStyle/>
-          <a:p>
-            <a:pPr algn="ctr"/>
-            <a:r>
-              <a:rPr sz="4400" b="1" i="0">
-                <a:solidFill>
-                  <a:srgbClr val="FFFFFF"/>
-                </a:solidFill>
-                <a:latin typeface="Arial"/>
-              </a:rPr>
-              <a:t>本当の自分を</a:t>
-            </a:r>
-          </a:p>
-        </p:txBody>
-      </p:sp>
-      <p:sp>
-        <p:nvSpPr>
-          <p:cNvPr id="6" name="TextBox 5"/>
-          <p:cNvSpPr txBox="1"/>
-          <p:nvPr/>
-        </p:nvSpPr>
-        <p:spPr>
-          <a:xfrm>
-            <a:off x="594360" y="4251960"/>
-            <a:ext cx="11002975" cy="384048"/>
+            <a:off x="640080" y="3753612"/>
+            <a:ext cx="10911535" cy="365760"/>
           </a:xfrm>
           <a:prstGeom prst="rect">
             <a:avLst/>
@@ -5054,46 +4634,11 @@
             <a:r>
               <a:rPr sz="2400" b="0" i="1">
                 <a:solidFill>
-                  <a:srgbClr val="B4B4B4"/>
+                  <a:srgbClr val="AAAAAA"/>
                 </a:solidFill>
                 <a:latin typeface="Arial"/>
               </a:rPr>
               <a:t>honto no jibun wo</a:t>
-            </a:r>
-          </a:p>
-        </p:txBody>
-      </p:sp>
-      <p:sp>
-        <p:nvSpPr>
-          <p:cNvPr id="7" name="TextBox 6"/>
-          <p:cNvSpPr txBox="1"/>
-          <p:nvPr/>
-        </p:nvSpPr>
-        <p:spPr>
-          <a:xfrm>
-            <a:off x="594360" y="4672584"/>
-            <a:ext cx="11002975" cy="347472"/>
-          </a:xfrm>
-          <a:prstGeom prst="rect">
-            <a:avLst/>
-          </a:prstGeom>
-          <a:noFill/>
-        </p:spPr>
-        <p:txBody>
-          <a:bodyPr wrap="square">
-            <a:spAutoFit/>
-          </a:bodyPr>
-          <a:lstStyle/>
-          <a:p>
-            <a:pPr algn="ctr"/>
-            <a:r>
-              <a:rPr sz="2000" b="0" i="1">
-                <a:solidFill>
-                  <a:srgbClr val="8C8C8C"/>
-                </a:solidFill>
-                <a:latin typeface="Arial"/>
-              </a:rPr>
-              <a:t/>
             </a:r>
           </a:p>
         </p:txBody>
@@ -5132,23 +4677,23 @@
         </p:nvSpPr>
         <p:spPr>
           <a:xfrm>
-            <a:off x="594360" y="2683764"/>
-            <a:ext cx="11002975" cy="685800"/>
-          </a:xfrm>
-          <a:prstGeom prst="rect">
-            <a:avLst/>
-          </a:prstGeom>
-          <a:noFill/>
-        </p:spPr>
-        <p:txBody>
-          <a:bodyPr wrap="square">
-            <a:spAutoFit/>
-          </a:bodyPr>
-          <a:lstStyle/>
-          <a:p>
-            <a:pPr algn="ctr"/>
-            <a:r>
-              <a:rPr sz="4400" b="1" i="0">
+            <a:off x="640080" y="2500884"/>
+            <a:ext cx="10911535" cy="731520"/>
+          </a:xfrm>
+          <a:prstGeom prst="rect">
+            <a:avLst/>
+          </a:prstGeom>
+          <a:noFill/>
+        </p:spPr>
+        <p:txBody>
+          <a:bodyPr wrap="square">
+            <a:spAutoFit/>
+          </a:bodyPr>
+          <a:lstStyle/>
+          <a:p>
+            <a:pPr algn="ctr"/>
+            <a:r>
+              <a:rPr sz="4800" b="1" i="0">
                 <a:solidFill>
                   <a:srgbClr val="FFFFFF"/>
                 </a:solidFill>
@@ -5167,8 +4712,8 @@
         </p:nvSpPr>
         <p:spPr>
           <a:xfrm>
-            <a:off x="594360" y="3406140"/>
-            <a:ext cx="11002975" cy="384048"/>
+            <a:off x="640080" y="3268980"/>
+            <a:ext cx="10911535" cy="365760"/>
           </a:xfrm>
           <a:prstGeom prst="rect">
             <a:avLst/>
@@ -5185,46 +4730,11 @@
             <a:r>
               <a:rPr sz="2400" b="0" i="1">
                 <a:solidFill>
-                  <a:srgbClr val="B4B4B4"/>
+                  <a:srgbClr val="AAAAAA"/>
                 </a:solidFill>
                 <a:latin typeface="Arial"/>
               </a:rPr>
               <a:t>oshiete kureta</a:t>
-            </a:r>
-          </a:p>
-        </p:txBody>
-      </p:sp>
-      <p:sp>
-        <p:nvSpPr>
-          <p:cNvPr id="4" name="TextBox 3"/>
-          <p:cNvSpPr txBox="1"/>
-          <p:nvPr/>
-        </p:nvSpPr>
-        <p:spPr>
-          <a:xfrm>
-            <a:off x="594360" y="3826764"/>
-            <a:ext cx="11002975" cy="347472"/>
-          </a:xfrm>
-          <a:prstGeom prst="rect">
-            <a:avLst/>
-          </a:prstGeom>
-          <a:noFill/>
-        </p:spPr>
-        <p:txBody>
-          <a:bodyPr wrap="square">
-            <a:spAutoFit/>
-          </a:bodyPr>
-          <a:lstStyle/>
-          <a:p>
-            <a:pPr algn="ctr"/>
-            <a:r>
-              <a:rPr sz="2000" b="0" i="1">
-                <a:solidFill>
-                  <a:srgbClr val="8C8C8C"/>
-                </a:solidFill>
-                <a:latin typeface="Arial"/>
-              </a:rPr>
-              <a:t/>
             </a:r>
           </a:p>
         </p:txBody>
@@ -5263,23 +4773,23 @@
         </p:nvSpPr>
         <p:spPr>
           <a:xfrm>
-            <a:off x="594360" y="2258568"/>
-            <a:ext cx="11002975" cy="685800"/>
-          </a:xfrm>
-          <a:prstGeom prst="rect">
-            <a:avLst/>
-          </a:prstGeom>
-          <a:noFill/>
-        </p:spPr>
-        <p:txBody>
-          <a:bodyPr wrap="square">
-            <a:spAutoFit/>
-          </a:bodyPr>
-          <a:lstStyle/>
-          <a:p>
-            <a:pPr algn="ctr"/>
-            <a:r>
-              <a:rPr sz="3520" b="1" i="0">
+            <a:off x="640080" y="2052828"/>
+            <a:ext cx="10911535" cy="731520"/>
+          </a:xfrm>
+          <a:prstGeom prst="rect">
+            <a:avLst/>
+          </a:prstGeom>
+          <a:noFill/>
+        </p:spPr>
+        <p:txBody>
+          <a:bodyPr wrap="square">
+            <a:spAutoFit/>
+          </a:bodyPr>
+          <a:lstStyle/>
+          <a:p>
+            <a:pPr algn="ctr"/>
+            <a:r>
+              <a:rPr sz="3800" b="1" i="0">
                 <a:solidFill>
                   <a:srgbClr val="FFFFFF"/>
                 </a:solidFill>
@@ -5298,29 +4808,29 @@
         </p:nvSpPr>
         <p:spPr>
           <a:xfrm>
-            <a:off x="594360" y="2980944"/>
-            <a:ext cx="11002975" cy="347472"/>
-          </a:xfrm>
-          <a:prstGeom prst="rect">
-            <a:avLst/>
-          </a:prstGeom>
-          <a:noFill/>
-        </p:spPr>
-        <p:txBody>
-          <a:bodyPr wrap="square">
-            <a:spAutoFit/>
-          </a:bodyPr>
-          <a:lstStyle/>
-          <a:p>
-            <a:pPr algn="ctr"/>
-            <a:r>
-              <a:rPr sz="2200" b="0" i="1">
-                <a:solidFill>
-                  <a:srgbClr val="8C8C8C"/>
-                </a:solidFill>
-                <a:latin typeface="Arial"/>
-              </a:rPr>
-              <a:t/>
+            <a:off x="640080" y="2985516"/>
+            <a:ext cx="10911535" cy="731520"/>
+          </a:xfrm>
+          <a:prstGeom prst="rect">
+            <a:avLst/>
+          </a:prstGeom>
+          <a:noFill/>
+        </p:spPr>
+        <p:txBody>
+          <a:bodyPr wrap="square">
+            <a:spAutoFit/>
+          </a:bodyPr>
+          <a:lstStyle/>
+          <a:p>
+            <a:pPr algn="ctr"/>
+            <a:r>
+              <a:rPr sz="4800" b="1" i="0">
+                <a:solidFill>
+                  <a:srgbClr val="FFFFFF"/>
+                </a:solidFill>
+                <a:latin typeface="Arial"/>
+              </a:rPr>
+              <a:t>Eu sou quem Tu dizes que eu sou</a:t>
             </a:r>
           </a:p>
         </p:txBody>
@@ -5333,29 +4843,29 @@
         </p:nvSpPr>
         <p:spPr>
           <a:xfrm>
-            <a:off x="594360" y="3529584"/>
-            <a:ext cx="11002975" cy="685800"/>
-          </a:xfrm>
-          <a:prstGeom prst="rect">
-            <a:avLst/>
-          </a:prstGeom>
-          <a:noFill/>
-        </p:spPr>
-        <p:txBody>
-          <a:bodyPr wrap="square">
-            <a:spAutoFit/>
-          </a:bodyPr>
-          <a:lstStyle/>
-          <a:p>
-            <a:pPr algn="ctr"/>
-            <a:r>
-              <a:rPr sz="4400" b="1" i="0">
-                <a:solidFill>
-                  <a:srgbClr val="FFFFFF"/>
-                </a:solidFill>
-                <a:latin typeface="Arial"/>
-              </a:rPr>
-              <a:t>Eu sou quem Tu dizes que eu sou</a:t>
+            <a:off x="640080" y="4128516"/>
+            <a:ext cx="10911535" cy="310896"/>
+          </a:xfrm>
+          <a:prstGeom prst="rect">
+            <a:avLst/>
+          </a:prstGeom>
+          <a:noFill/>
+        </p:spPr>
+        <p:txBody>
+          <a:bodyPr wrap="square">
+            <a:spAutoFit/>
+          </a:bodyPr>
+          <a:lstStyle/>
+          <a:p>
+            <a:pPr algn="ctr"/>
+            <a:r>
+              <a:rPr sz="2000" b="0" i="0">
+                <a:solidFill>
+                  <a:srgbClr val="828282"/>
+                </a:solidFill>
+                <a:latin typeface="Arial"/>
+              </a:rPr>
+              <a:t>受け入れてくれた</a:t>
             </a:r>
           </a:p>
         </p:txBody>
@@ -5368,29 +4878,29 @@
         </p:nvSpPr>
         <p:spPr>
           <a:xfrm>
-            <a:off x="594360" y="4251960"/>
-            <a:ext cx="11002975" cy="347472"/>
-          </a:xfrm>
-          <a:prstGeom prst="rect">
-            <a:avLst/>
-          </a:prstGeom>
-          <a:noFill/>
-        </p:spPr>
-        <p:txBody>
-          <a:bodyPr wrap="square">
-            <a:spAutoFit/>
-          </a:bodyPr>
-          <a:lstStyle/>
-          <a:p>
-            <a:pPr algn="ctr"/>
-            <a:r>
-              <a:rPr sz="2200" b="0" i="1">
-                <a:solidFill>
-                  <a:srgbClr val="8C8C8C"/>
-                </a:solidFill>
-                <a:latin typeface="Arial"/>
-              </a:rPr>
-              <a:t/>
+            <a:off x="640080" y="4494276"/>
+            <a:ext cx="10911535" cy="310896"/>
+          </a:xfrm>
+          <a:prstGeom prst="rect">
+            <a:avLst/>
+          </a:prstGeom>
+          <a:noFill/>
+        </p:spPr>
+        <p:txBody>
+          <a:bodyPr wrap="square">
+            <a:spAutoFit/>
+          </a:bodyPr>
+          <a:lstStyle/>
+          <a:p>
+            <a:pPr algn="ctr"/>
+            <a:r>
+              <a:rPr sz="2000" b="0" i="0">
+                <a:solidFill>
+                  <a:srgbClr val="828282"/>
+                </a:solidFill>
+                <a:latin typeface="Arial"/>
+              </a:rPr>
+              <a:t>神の愛  神の愛</a:t>
             </a:r>
           </a:p>
         </p:txBody>
@@ -5429,64 +4939,29 @@
         </p:nvSpPr>
         <p:spPr>
           <a:xfrm>
-            <a:off x="594360" y="2894076"/>
-            <a:ext cx="11002975" cy="685800"/>
-          </a:xfrm>
-          <a:prstGeom prst="rect">
-            <a:avLst/>
-          </a:prstGeom>
-          <a:noFill/>
-        </p:spPr>
-        <p:txBody>
-          <a:bodyPr wrap="square">
-            <a:spAutoFit/>
-          </a:bodyPr>
-          <a:lstStyle/>
-          <a:p>
-            <a:pPr algn="ctr"/>
-            <a:r>
-              <a:rPr sz="4400" b="1" i="0">
+            <a:off x="640080" y="2702052"/>
+            <a:ext cx="10911535" cy="731520"/>
+          </a:xfrm>
+          <a:prstGeom prst="rect">
+            <a:avLst/>
+          </a:prstGeom>
+          <a:noFill/>
+        </p:spPr>
+        <p:txBody>
+          <a:bodyPr wrap="square">
+            <a:spAutoFit/>
+          </a:bodyPr>
+          <a:lstStyle/>
+          <a:p>
+            <a:pPr algn="ctr"/>
+            <a:r>
+              <a:rPr sz="4800" b="1" i="0">
                 <a:solidFill>
                   <a:srgbClr val="FFFFFF"/>
                 </a:solidFill>
                 <a:latin typeface="Arial"/>
               </a:rPr>
               <a:t>Estou livre</a:t>
-            </a:r>
-          </a:p>
-        </p:txBody>
-      </p:sp>
-      <p:sp>
-        <p:nvSpPr>
-          <p:cNvPr id="3" name="TextBox 2"/>
-          <p:cNvSpPr txBox="1"/>
-          <p:nvPr/>
-        </p:nvSpPr>
-        <p:spPr>
-          <a:xfrm>
-            <a:off x="594360" y="3616452"/>
-            <a:ext cx="11002975" cy="347472"/>
-          </a:xfrm>
-          <a:prstGeom prst="rect">
-            <a:avLst/>
-          </a:prstGeom>
-          <a:noFill/>
-        </p:spPr>
-        <p:txBody>
-          <a:bodyPr wrap="square">
-            <a:spAutoFit/>
-          </a:bodyPr>
-          <a:lstStyle/>
-          <a:p>
-            <a:pPr algn="ctr"/>
-            <a:r>
-              <a:rPr sz="2200" b="0" i="1">
-                <a:solidFill>
-                  <a:srgbClr val="8C8C8C"/>
-                </a:solidFill>
-                <a:latin typeface="Arial"/>
-              </a:rPr>
-              <a:t/>
             </a:r>
           </a:p>
         </p:txBody>
@@ -5525,23 +5000,23 @@
         </p:nvSpPr>
         <p:spPr>
           <a:xfrm>
-            <a:off x="594360" y="2258568"/>
-            <a:ext cx="11002975" cy="685800"/>
-          </a:xfrm>
-          <a:prstGeom prst="rect">
-            <a:avLst/>
-          </a:prstGeom>
-          <a:noFill/>
-        </p:spPr>
-        <p:txBody>
-          <a:bodyPr wrap="square">
-            <a:spAutoFit/>
-          </a:bodyPr>
-          <a:lstStyle/>
-          <a:p>
-            <a:pPr algn="ctr"/>
-            <a:r>
-              <a:rPr sz="4400" b="1" i="0">
+            <a:off x="640080" y="2052828"/>
+            <a:ext cx="10911535" cy="731520"/>
+          </a:xfrm>
+          <a:prstGeom prst="rect">
+            <a:avLst/>
+          </a:prstGeom>
+          <a:noFill/>
+        </p:spPr>
+        <p:txBody>
+          <a:bodyPr wrap="square">
+            <a:spAutoFit/>
+          </a:bodyPr>
+          <a:lstStyle/>
+          <a:p>
+            <a:pPr algn="ctr"/>
+            <a:r>
+              <a:rPr sz="4800" b="1" i="0">
                 <a:solidFill>
                   <a:srgbClr val="FFFFFF"/>
                 </a:solidFill>
@@ -5560,99 +5035,29 @@
         </p:nvSpPr>
         <p:spPr>
           <a:xfrm>
-            <a:off x="594360" y="2980944"/>
-            <a:ext cx="11002975" cy="347472"/>
-          </a:xfrm>
-          <a:prstGeom prst="rect">
-            <a:avLst/>
-          </a:prstGeom>
-          <a:noFill/>
-        </p:spPr>
-        <p:txBody>
-          <a:bodyPr wrap="square">
-            <a:spAutoFit/>
-          </a:bodyPr>
-          <a:lstStyle/>
-          <a:p>
-            <a:pPr algn="ctr"/>
-            <a:r>
-              <a:rPr sz="2200" b="0" i="1">
-                <a:solidFill>
-                  <a:srgbClr val="8C8C8C"/>
-                </a:solidFill>
-                <a:latin typeface="Arial"/>
-              </a:rPr>
-              <a:t/>
-            </a:r>
-          </a:p>
-        </p:txBody>
-      </p:sp>
-      <p:sp>
-        <p:nvSpPr>
-          <p:cNvPr id="4" name="TextBox 3"/>
-          <p:cNvSpPr txBox="1"/>
-          <p:nvPr/>
-        </p:nvSpPr>
-        <p:spPr>
-          <a:xfrm>
-            <a:off x="594360" y="3529584"/>
-            <a:ext cx="11002975" cy="685800"/>
-          </a:xfrm>
-          <a:prstGeom prst="rect">
-            <a:avLst/>
-          </a:prstGeom>
-          <a:noFill/>
-        </p:spPr>
-        <p:txBody>
-          <a:bodyPr wrap="square">
-            <a:spAutoFit/>
-          </a:bodyPr>
-          <a:lstStyle/>
-          <a:p>
-            <a:pPr algn="ctr"/>
-            <a:r>
-              <a:rPr sz="4400" b="1" i="0">
+            <a:off x="640080" y="2985516"/>
+            <a:ext cx="10911535" cy="731520"/>
+          </a:xfrm>
+          <a:prstGeom prst="rect">
+            <a:avLst/>
+          </a:prstGeom>
+          <a:noFill/>
+        </p:spPr>
+        <p:txBody>
+          <a:bodyPr wrap="square">
+            <a:spAutoFit/>
+          </a:bodyPr>
+          <a:lstStyle/>
+          <a:p>
+            <a:pPr algn="ctr"/>
+            <a:r>
+              <a:rPr sz="4800" b="1" i="0">
                 <a:solidFill>
                   <a:srgbClr val="FFFFFF"/>
                 </a:solidFill>
                 <a:latin typeface="Arial"/>
               </a:rPr>
               <a:t>Não mais escravo do medo</a:t>
-            </a:r>
-          </a:p>
-        </p:txBody>
-      </p:sp>
-      <p:sp>
-        <p:nvSpPr>
-          <p:cNvPr id="5" name="TextBox 4"/>
-          <p:cNvSpPr txBox="1"/>
-          <p:nvPr/>
-        </p:nvSpPr>
-        <p:spPr>
-          <a:xfrm>
-            <a:off x="594360" y="4251960"/>
-            <a:ext cx="11002975" cy="347472"/>
-          </a:xfrm>
-          <a:prstGeom prst="rect">
-            <a:avLst/>
-          </a:prstGeom>
-          <a:noFill/>
-        </p:spPr>
-        <p:txBody>
-          <a:bodyPr wrap="square">
-            <a:spAutoFit/>
-          </a:bodyPr>
-          <a:lstStyle/>
-          <a:p>
-            <a:pPr algn="ctr"/>
-            <a:r>
-              <a:rPr sz="2200" b="0" i="1">
-                <a:solidFill>
-                  <a:srgbClr val="8C8C8C"/>
-                </a:solidFill>
-                <a:latin typeface="Arial"/>
-              </a:rPr>
-              <a:t/>
             </a:r>
           </a:p>
         </p:txBody>
@@ -5691,23 +5096,23 @@
         </p:nvSpPr>
         <p:spPr>
           <a:xfrm>
-            <a:off x="594360" y="2258568"/>
-            <a:ext cx="11002975" cy="685800"/>
-          </a:xfrm>
-          <a:prstGeom prst="rect">
-            <a:avLst/>
-          </a:prstGeom>
-          <a:noFill/>
-        </p:spPr>
-        <p:txBody>
-          <a:bodyPr wrap="square">
-            <a:spAutoFit/>
-          </a:bodyPr>
-          <a:lstStyle/>
-          <a:p>
-            <a:pPr algn="ctr"/>
-            <a:r>
-              <a:rPr sz="4400" b="1" i="0">
+            <a:off x="640080" y="2052828"/>
+            <a:ext cx="10911535" cy="731520"/>
+          </a:xfrm>
+          <a:prstGeom prst="rect">
+            <a:avLst/>
+          </a:prstGeom>
+          <a:noFill/>
+        </p:spPr>
+        <p:txBody>
+          <a:bodyPr wrap="square">
+            <a:spAutoFit/>
+          </a:bodyPr>
+          <a:lstStyle/>
+          <a:p>
+            <a:pPr algn="ctr"/>
+            <a:r>
+              <a:rPr sz="4800" b="1" i="0">
                 <a:solidFill>
                   <a:srgbClr val="FFFFFF"/>
                 </a:solidFill>
@@ -5726,99 +5131,29 @@
         </p:nvSpPr>
         <p:spPr>
           <a:xfrm>
-            <a:off x="594360" y="2980944"/>
-            <a:ext cx="11002975" cy="347472"/>
-          </a:xfrm>
-          <a:prstGeom prst="rect">
-            <a:avLst/>
-          </a:prstGeom>
-          <a:noFill/>
-        </p:spPr>
-        <p:txBody>
-          <a:bodyPr wrap="square">
-            <a:spAutoFit/>
-          </a:bodyPr>
-          <a:lstStyle/>
-          <a:p>
-            <a:pPr algn="ctr"/>
-            <a:r>
-              <a:rPr sz="2200" b="0" i="1">
-                <a:solidFill>
-                  <a:srgbClr val="8C8C8C"/>
-                </a:solidFill>
-                <a:latin typeface="Arial"/>
-              </a:rPr>
-              <a:t/>
-            </a:r>
-          </a:p>
-        </p:txBody>
-      </p:sp>
-      <p:sp>
-        <p:nvSpPr>
-          <p:cNvPr id="4" name="TextBox 3"/>
-          <p:cNvSpPr txBox="1"/>
-          <p:nvPr/>
-        </p:nvSpPr>
-        <p:spPr>
-          <a:xfrm>
-            <a:off x="594360" y="3529584"/>
-            <a:ext cx="11002975" cy="685800"/>
-          </a:xfrm>
-          <a:prstGeom prst="rect">
-            <a:avLst/>
-          </a:prstGeom>
-          <a:noFill/>
-        </p:spPr>
-        <p:txBody>
-          <a:bodyPr wrap="square">
-            <a:spAutoFit/>
-          </a:bodyPr>
-          <a:lstStyle/>
-          <a:p>
-            <a:pPr algn="ctr"/>
-            <a:r>
-              <a:rPr sz="4400" b="1" i="0">
+            <a:off x="640080" y="2985516"/>
+            <a:ext cx="10911535" cy="731520"/>
+          </a:xfrm>
+          <a:prstGeom prst="rect">
+            <a:avLst/>
+          </a:prstGeom>
+          <a:noFill/>
+        </p:spPr>
+        <p:txBody>
+          <a:bodyPr wrap="square">
+            <a:spAutoFit/>
+          </a:bodyPr>
+          <a:lstStyle/>
+          <a:p>
+            <a:pPr algn="ctr"/>
+            <a:r>
+              <a:rPr sz="4800" b="1" i="0">
                 <a:solidFill>
                   <a:srgbClr val="FFFFFF"/>
                 </a:solidFill>
                 <a:latin typeface="Arial"/>
               </a:rPr>
               <a:t>No lugar de dor e de vergonha</a:t>
-            </a:r>
-          </a:p>
-        </p:txBody>
-      </p:sp>
-      <p:sp>
-        <p:nvSpPr>
-          <p:cNvPr id="5" name="TextBox 4"/>
-          <p:cNvSpPr txBox="1"/>
-          <p:nvPr/>
-        </p:nvSpPr>
-        <p:spPr>
-          <a:xfrm>
-            <a:off x="594360" y="4251960"/>
-            <a:ext cx="11002975" cy="347472"/>
-          </a:xfrm>
-          <a:prstGeom prst="rect">
-            <a:avLst/>
-          </a:prstGeom>
-          <a:noFill/>
-        </p:spPr>
-        <p:txBody>
-          <a:bodyPr wrap="square">
-            <a:spAutoFit/>
-          </a:bodyPr>
-          <a:lstStyle/>
-          <a:p>
-            <a:pPr algn="ctr"/>
-            <a:r>
-              <a:rPr sz="2200" b="0" i="1">
-                <a:solidFill>
-                  <a:srgbClr val="8C8C8C"/>
-                </a:solidFill>
-                <a:latin typeface="Arial"/>
-              </a:rPr>
-              <a:t/>
             </a:r>
           </a:p>
         </p:txBody>
@@ -5857,23 +5192,23 @@
         </p:nvSpPr>
         <p:spPr>
           <a:xfrm>
-            <a:off x="594360" y="1837944"/>
-            <a:ext cx="11002975" cy="685800"/>
-          </a:xfrm>
-          <a:prstGeom prst="rect">
-            <a:avLst/>
-          </a:prstGeom>
-          <a:noFill/>
-        </p:spPr>
-        <p:txBody>
-          <a:bodyPr wrap="square">
-            <a:spAutoFit/>
-          </a:bodyPr>
-          <a:lstStyle/>
-          <a:p>
-            <a:pPr algn="ctr"/>
-            <a:r>
-              <a:rPr sz="4400" b="1" i="0">
+            <a:off x="640080" y="1650492"/>
+            <a:ext cx="10911535" cy="731520"/>
+          </a:xfrm>
+          <a:prstGeom prst="rect">
+            <a:avLst/>
+          </a:prstGeom>
+          <a:noFill/>
+        </p:spPr>
+        <p:txBody>
+          <a:bodyPr wrap="square">
+            <a:spAutoFit/>
+          </a:bodyPr>
+          <a:lstStyle/>
+          <a:p>
+            <a:pPr algn="ctr"/>
+            <a:r>
+              <a:rPr sz="4800" b="1" i="0">
                 <a:solidFill>
                   <a:srgbClr val="FFFFFF"/>
                 </a:solidFill>
@@ -5892,8 +5227,8 @@
         </p:nvSpPr>
         <p:spPr>
           <a:xfrm>
-            <a:off x="594360" y="2560320"/>
-            <a:ext cx="11002975" cy="384048"/>
+            <a:off x="640080" y="2418588"/>
+            <a:ext cx="10911535" cy="365760"/>
           </a:xfrm>
           <a:prstGeom prst="rect">
             <a:avLst/>
@@ -5910,7 +5245,7 @@
             <a:r>
               <a:rPr sz="2400" b="0" i="1">
                 <a:solidFill>
-                  <a:srgbClr val="B4B4B4"/>
+                  <a:srgbClr val="AAAAAA"/>
                 </a:solidFill>
                 <a:latin typeface="Arial"/>
               </a:rPr>
@@ -5927,8 +5262,78 @@
         </p:nvSpPr>
         <p:spPr>
           <a:xfrm>
-            <a:off x="594360" y="2980944"/>
-            <a:ext cx="11002975" cy="347472"/>
+            <a:off x="640080" y="2985516"/>
+            <a:ext cx="10911535" cy="731520"/>
+          </a:xfrm>
+          <a:prstGeom prst="rect">
+            <a:avLst/>
+          </a:prstGeom>
+          <a:noFill/>
+        </p:spPr>
+        <p:txBody>
+          <a:bodyPr wrap="square">
+            <a:spAutoFit/>
+          </a:bodyPr>
+          <a:lstStyle/>
+          <a:p>
+            <a:pPr algn="ctr"/>
+            <a:r>
+              <a:rPr sz="4800" b="1" i="0">
+                <a:solidFill>
+                  <a:srgbClr val="FFFFFF"/>
+                </a:solidFill>
+                <a:latin typeface="Arial"/>
+              </a:rPr>
+              <a:t>招いた王</a:t>
+            </a:r>
+          </a:p>
+        </p:txBody>
+      </p:sp>
+      <p:sp>
+        <p:nvSpPr>
+          <p:cNvPr id="5" name="TextBox 4"/>
+          <p:cNvSpPr txBox="1"/>
+          <p:nvPr/>
+        </p:nvSpPr>
+        <p:spPr>
+          <a:xfrm>
+            <a:off x="640080" y="3753612"/>
+            <a:ext cx="10911535" cy="365760"/>
+          </a:xfrm>
+          <a:prstGeom prst="rect">
+            <a:avLst/>
+          </a:prstGeom>
+          <a:noFill/>
+        </p:spPr>
+        <p:txBody>
+          <a:bodyPr wrap="square">
+            <a:spAutoFit/>
+          </a:bodyPr>
+          <a:lstStyle/>
+          <a:p>
+            <a:pPr algn="ctr"/>
+            <a:r>
+              <a:rPr sz="2400" b="0" i="1">
+                <a:solidFill>
+                  <a:srgbClr val="AAAAAA"/>
+                </a:solidFill>
+                <a:latin typeface="Arial"/>
+              </a:rPr>
+              <a:t>maneita o</a:t>
+            </a:r>
+          </a:p>
+        </p:txBody>
+      </p:sp>
+      <p:sp>
+        <p:nvSpPr>
+          <p:cNvPr id="6" name="TextBox 5"/>
+          <p:cNvSpPr txBox="1"/>
+          <p:nvPr/>
+        </p:nvSpPr>
+        <p:spPr>
+          <a:xfrm>
+            <a:off x="640080" y="4530852"/>
+            <a:ext cx="10911535" cy="310896"/>
           </a:xfrm>
           <a:prstGeom prst="rect">
             <a:avLst/>
@@ -5945,81 +5350,11 @@
             <a:r>
               <a:rPr sz="2000" b="0" i="1">
                 <a:solidFill>
-                  <a:srgbClr val="8C8C8C"/>
-                </a:solidFill>
-                <a:latin typeface="Arial"/>
-              </a:rPr>
-              <a:t/>
-            </a:r>
-          </a:p>
-        </p:txBody>
-      </p:sp>
-      <p:sp>
-        <p:nvSpPr>
-          <p:cNvPr id="5" name="TextBox 4"/>
-          <p:cNvSpPr txBox="1"/>
-          <p:nvPr/>
-        </p:nvSpPr>
-        <p:spPr>
-          <a:xfrm>
-            <a:off x="594360" y="3529584"/>
-            <a:ext cx="11002975" cy="685800"/>
-          </a:xfrm>
-          <a:prstGeom prst="rect">
-            <a:avLst/>
-          </a:prstGeom>
-          <a:noFill/>
-        </p:spPr>
-        <p:txBody>
-          <a:bodyPr wrap="square">
-            <a:spAutoFit/>
-          </a:bodyPr>
-          <a:lstStyle/>
-          <a:p>
-            <a:pPr algn="ctr"/>
-            <a:r>
-              <a:rPr sz="4400" b="1" i="0">
-                <a:solidFill>
-                  <a:srgbClr val="FFFFFF"/>
-                </a:solidFill>
-                <a:latin typeface="Arial"/>
-              </a:rPr>
-              <a:t>招いた王</a:t>
-            </a:r>
-          </a:p>
-        </p:txBody>
-      </p:sp>
-      <p:sp>
-        <p:nvSpPr>
-          <p:cNvPr id="6" name="TextBox 5"/>
-          <p:cNvSpPr txBox="1"/>
-          <p:nvPr/>
-        </p:nvSpPr>
-        <p:spPr>
-          <a:xfrm>
-            <a:off x="594360" y="4251960"/>
-            <a:ext cx="11002975" cy="384048"/>
-          </a:xfrm>
-          <a:prstGeom prst="rect">
-            <a:avLst/>
-          </a:prstGeom>
-          <a:noFill/>
-        </p:spPr>
-        <p:txBody>
-          <a:bodyPr wrap="square">
-            <a:spAutoFit/>
-          </a:bodyPr>
-          <a:lstStyle/>
-          <a:p>
-            <a:pPr algn="ctr"/>
-            <a:r>
-              <a:rPr sz="2400" b="0" i="1">
-                <a:solidFill>
-                  <a:srgbClr val="B4B4B4"/>
-                </a:solidFill>
-                <a:latin typeface="Arial"/>
-              </a:rPr>
-              <a:t>maneita o</a:t>
+                  <a:srgbClr val="828282"/>
+                </a:solidFill>
+                <a:latin typeface="Arial"/>
+              </a:rPr>
+              <a:t>É o maior amor que jamais vi</a:t>
             </a:r>
           </a:p>
         </p:txBody>
@@ -6032,8 +5367,8 @@
         </p:nvSpPr>
         <p:spPr>
           <a:xfrm>
-            <a:off x="594360" y="4672584"/>
-            <a:ext cx="11002975" cy="347472"/>
+            <a:off x="640080" y="4896612"/>
+            <a:ext cx="10911535" cy="310896"/>
           </a:xfrm>
           <a:prstGeom prst="rect">
             <a:avLst/>
@@ -6050,11 +5385,11 @@
             <a:r>
               <a:rPr sz="2000" b="0" i="1">
                 <a:solidFill>
-                  <a:srgbClr val="8C8C8C"/>
-                </a:solidFill>
-                <a:latin typeface="Arial"/>
-              </a:rPr>
-              <a:t/>
+                  <a:srgbClr val="828282"/>
+                </a:solidFill>
+                <a:latin typeface="Arial"/>
+              </a:rPr>
+              <a:t>Sou encontrado por Ti</a:t>
             </a:r>
           </a:p>
         </p:txBody>
@@ -6093,23 +5428,23 @@
         </p:nvSpPr>
         <p:spPr>
           <a:xfrm>
-            <a:off x="594360" y="1837944"/>
-            <a:ext cx="11002975" cy="685800"/>
-          </a:xfrm>
-          <a:prstGeom prst="rect">
-            <a:avLst/>
-          </a:prstGeom>
-          <a:noFill/>
-        </p:spPr>
-        <p:txBody>
-          <a:bodyPr wrap="square">
-            <a:spAutoFit/>
-          </a:bodyPr>
-          <a:lstStyle/>
-          <a:p>
-            <a:pPr algn="ctr"/>
-            <a:r>
-              <a:rPr sz="4400" b="1" i="0">
+            <a:off x="640080" y="1650492"/>
+            <a:ext cx="10911535" cy="731520"/>
+          </a:xfrm>
+          <a:prstGeom prst="rect">
+            <a:avLst/>
+          </a:prstGeom>
+          <a:noFill/>
+        </p:spPr>
+        <p:txBody>
+          <a:bodyPr wrap="square">
+            <a:spAutoFit/>
+          </a:bodyPr>
+          <a:lstStyle/>
+          <a:p>
+            <a:pPr algn="ctr"/>
+            <a:r>
+              <a:rPr sz="4800" b="1" i="0">
                 <a:solidFill>
                   <a:srgbClr val="FFFFFF"/>
                 </a:solidFill>
@@ -6128,8 +5463,8 @@
         </p:nvSpPr>
         <p:spPr>
           <a:xfrm>
-            <a:off x="594360" y="2560320"/>
-            <a:ext cx="11002975" cy="384048"/>
+            <a:off x="640080" y="2418588"/>
+            <a:ext cx="10911535" cy="365760"/>
           </a:xfrm>
           <a:prstGeom prst="rect">
             <a:avLst/>
@@ -6146,7 +5481,7 @@
             <a:r>
               <a:rPr sz="2400" b="0" i="1">
                 <a:solidFill>
-                  <a:srgbClr val="B4B4B4"/>
+                  <a:srgbClr val="AAAAAA"/>
                 </a:solidFill>
                 <a:latin typeface="Arial"/>
               </a:rPr>
@@ -6163,8 +5498,78 @@
         </p:nvSpPr>
         <p:spPr>
           <a:xfrm>
-            <a:off x="594360" y="2980944"/>
-            <a:ext cx="11002975" cy="347472"/>
+            <a:off x="640080" y="2985516"/>
+            <a:ext cx="10911535" cy="731520"/>
+          </a:xfrm>
+          <a:prstGeom prst="rect">
+            <a:avLst/>
+          </a:prstGeom>
+          <a:noFill/>
+        </p:spPr>
+        <p:txBody>
+          <a:bodyPr wrap="square">
+            <a:spAutoFit/>
+          </a:bodyPr>
+          <a:lstStyle/>
+          <a:p>
+            <a:pPr algn="ctr"/>
+            <a:r>
+              <a:rPr sz="4800" b="1" i="0">
+                <a:solidFill>
+                  <a:srgbClr val="FFFFFF"/>
+                </a:solidFill>
+                <a:latin typeface="Arial"/>
+              </a:rPr>
+              <a:t>神の愛  神の愛</a:t>
+            </a:r>
+          </a:p>
+        </p:txBody>
+      </p:sp>
+      <p:sp>
+        <p:nvSpPr>
+          <p:cNvPr id="5" name="TextBox 4"/>
+          <p:cNvSpPr txBox="1"/>
+          <p:nvPr/>
+        </p:nvSpPr>
+        <p:spPr>
+          <a:xfrm>
+            <a:off x="640080" y="3753612"/>
+            <a:ext cx="10911535" cy="365760"/>
+          </a:xfrm>
+          <a:prstGeom prst="rect">
+            <a:avLst/>
+          </a:prstGeom>
+          <a:noFill/>
+        </p:spPr>
+        <p:txBody>
+          <a:bodyPr wrap="square">
+            <a:spAutoFit/>
+          </a:bodyPr>
+          <a:lstStyle/>
+          <a:p>
+            <a:pPr algn="ctr"/>
+            <a:r>
+              <a:rPr sz="2400" b="0" i="1">
+                <a:solidFill>
+                  <a:srgbClr val="AAAAAA"/>
+                </a:solidFill>
+                <a:latin typeface="Arial"/>
+              </a:rPr>
+              <a:t>kami no ai kami no ai</a:t>
+            </a:r>
+          </a:p>
+        </p:txBody>
+      </p:sp>
+      <p:sp>
+        <p:nvSpPr>
+          <p:cNvPr id="6" name="TextBox 5"/>
+          <p:cNvSpPr txBox="1"/>
+          <p:nvPr/>
+        </p:nvSpPr>
+        <p:spPr>
+          <a:xfrm>
+            <a:off x="640080" y="4530852"/>
+            <a:ext cx="10911535" cy="310896"/>
           </a:xfrm>
           <a:prstGeom prst="rect">
             <a:avLst/>
@@ -6181,81 +5586,11 @@
             <a:r>
               <a:rPr sz="2000" b="0" i="1">
                 <a:solidFill>
-                  <a:srgbClr val="8C8C8C"/>
-                </a:solidFill>
-                <a:latin typeface="Arial"/>
-              </a:rPr>
-              <a:t/>
-            </a:r>
-          </a:p>
-        </p:txBody>
-      </p:sp>
-      <p:sp>
-        <p:nvSpPr>
-          <p:cNvPr id="5" name="TextBox 4"/>
-          <p:cNvSpPr txBox="1"/>
-          <p:nvPr/>
-        </p:nvSpPr>
-        <p:spPr>
-          <a:xfrm>
-            <a:off x="594360" y="3529584"/>
-            <a:ext cx="11002975" cy="685800"/>
-          </a:xfrm>
-          <a:prstGeom prst="rect">
-            <a:avLst/>
-          </a:prstGeom>
-          <a:noFill/>
-        </p:spPr>
-        <p:txBody>
-          <a:bodyPr wrap="square">
-            <a:spAutoFit/>
-          </a:bodyPr>
-          <a:lstStyle/>
-          <a:p>
-            <a:pPr algn="ctr"/>
-            <a:r>
-              <a:rPr sz="4400" b="1" i="0">
-                <a:solidFill>
-                  <a:srgbClr val="FFFFFF"/>
-                </a:solidFill>
-                <a:latin typeface="Arial"/>
-              </a:rPr>
-              <a:t>神の愛  神の愛</a:t>
-            </a:r>
-          </a:p>
-        </p:txBody>
-      </p:sp>
-      <p:sp>
-        <p:nvSpPr>
-          <p:cNvPr id="6" name="TextBox 5"/>
-          <p:cNvSpPr txBox="1"/>
-          <p:nvPr/>
-        </p:nvSpPr>
-        <p:spPr>
-          <a:xfrm>
-            <a:off x="594360" y="4251960"/>
-            <a:ext cx="11002975" cy="384048"/>
-          </a:xfrm>
-          <a:prstGeom prst="rect">
-            <a:avLst/>
-          </a:prstGeom>
-          <a:noFill/>
-        </p:spPr>
-        <p:txBody>
-          <a:bodyPr wrap="square">
-            <a:spAutoFit/>
-          </a:bodyPr>
-          <a:lstStyle/>
-          <a:p>
-            <a:pPr algn="ctr"/>
-            <a:r>
-              <a:rPr sz="2400" b="0" i="1">
-                <a:solidFill>
-                  <a:srgbClr val="B4B4B4"/>
-                </a:solidFill>
-                <a:latin typeface="Arial"/>
-              </a:rPr>
-              <a:t>kami no ai kami no ai</a:t>
+                  <a:srgbClr val="828282"/>
+                </a:solidFill>
+                <a:latin typeface="Arial"/>
+              </a:rPr>
+              <a:t>Quem o Filho libertou é livre de verdade</a:t>
             </a:r>
           </a:p>
         </p:txBody>
@@ -6268,8 +5603,8 @@
         </p:nvSpPr>
         <p:spPr>
           <a:xfrm>
-            <a:off x="594360" y="4672584"/>
-            <a:ext cx="11002975" cy="347472"/>
+            <a:off x="640080" y="4896612"/>
+            <a:ext cx="10911535" cy="310896"/>
           </a:xfrm>
           <a:prstGeom prst="rect">
             <a:avLst/>
@@ -6286,11 +5621,11 @@
             <a:r>
               <a:rPr sz="2000" b="0" i="1">
                 <a:solidFill>
-                  <a:srgbClr val="8C8C8C"/>
-                </a:solidFill>
-                <a:latin typeface="Arial"/>
-              </a:rPr>
-              <a:t/>
+                  <a:srgbClr val="828282"/>
+                </a:solidFill>
+                <a:latin typeface="Arial"/>
+              </a:rPr>
+              <a:t>Eu sou quem Tu dizes que eu sou</a:t>
             </a:r>
           </a:p>
         </p:txBody>
@@ -6329,23 +5664,23 @@
         </p:nvSpPr>
         <p:spPr>
           <a:xfrm>
-            <a:off x="594360" y="1837944"/>
-            <a:ext cx="11002975" cy="685800"/>
-          </a:xfrm>
-          <a:prstGeom prst="rect">
-            <a:avLst/>
-          </a:prstGeom>
-          <a:noFill/>
-        </p:spPr>
-        <p:txBody>
-          <a:bodyPr wrap="square">
-            <a:spAutoFit/>
-          </a:bodyPr>
-          <a:lstStyle/>
-          <a:p>
-            <a:pPr algn="ctr"/>
-            <a:r>
-              <a:rPr sz="4400" b="1" i="0">
+            <a:off x="640080" y="1650492"/>
+            <a:ext cx="10911535" cy="731520"/>
+          </a:xfrm>
+          <a:prstGeom prst="rect">
+            <a:avLst/>
+          </a:prstGeom>
+          <a:noFill/>
+        </p:spPr>
+        <p:txBody>
+          <a:bodyPr wrap="square">
+            <a:spAutoFit/>
+          </a:bodyPr>
+          <a:lstStyle/>
+          <a:p>
+            <a:pPr algn="ctr"/>
+            <a:r>
+              <a:rPr sz="4800" b="1" i="0">
                 <a:solidFill>
                   <a:srgbClr val="FFFFFF"/>
                 </a:solidFill>
@@ -6364,8 +5699,8 @@
         </p:nvSpPr>
         <p:spPr>
           <a:xfrm>
-            <a:off x="594360" y="2560320"/>
-            <a:ext cx="11002975" cy="384048"/>
+            <a:off x="640080" y="2418588"/>
+            <a:ext cx="10911535" cy="365760"/>
           </a:xfrm>
           <a:prstGeom prst="rect">
             <a:avLst/>
@@ -6382,7 +5717,7 @@
             <a:r>
               <a:rPr sz="2400" b="0" i="1">
                 <a:solidFill>
-                  <a:srgbClr val="B4B4B4"/>
+                  <a:srgbClr val="AAAAAA"/>
                 </a:solidFill>
                 <a:latin typeface="Arial"/>
               </a:rPr>
@@ -6399,8 +5734,78 @@
         </p:nvSpPr>
         <p:spPr>
           <a:xfrm>
-            <a:off x="594360" y="2980944"/>
-            <a:ext cx="11002975" cy="347472"/>
+            <a:off x="640080" y="2985516"/>
+            <a:ext cx="10911535" cy="731520"/>
+          </a:xfrm>
+          <a:prstGeom prst="rect">
+            <a:avLst/>
+          </a:prstGeom>
+          <a:noFill/>
+        </p:spPr>
+        <p:txBody>
+          <a:bodyPr wrap="square">
+            <a:spAutoFit/>
+          </a:bodyPr>
+          <a:lstStyle/>
+          <a:p>
+            <a:pPr algn="ctr"/>
+            <a:r>
+              <a:rPr sz="4800" b="1" i="0">
+                <a:solidFill>
+                  <a:srgbClr val="FFFFFF"/>
+                </a:solidFill>
+                <a:latin typeface="Arial"/>
+              </a:rPr>
+              <a:t>神の子ども Yes I am</a:t>
+            </a:r>
+          </a:p>
+        </p:txBody>
+      </p:sp>
+      <p:sp>
+        <p:nvSpPr>
+          <p:cNvPr id="5" name="TextBox 4"/>
+          <p:cNvSpPr txBox="1"/>
+          <p:nvPr/>
+        </p:nvSpPr>
+        <p:spPr>
+          <a:xfrm>
+            <a:off x="640080" y="3753612"/>
+            <a:ext cx="10911535" cy="365760"/>
+          </a:xfrm>
+          <a:prstGeom prst="rect">
+            <a:avLst/>
+          </a:prstGeom>
+          <a:noFill/>
+        </p:spPr>
+        <p:txBody>
+          <a:bodyPr wrap="square">
+            <a:spAutoFit/>
+          </a:bodyPr>
+          <a:lstStyle/>
+          <a:p>
+            <a:pPr algn="ctr"/>
+            <a:r>
+              <a:rPr sz="2400" b="0" i="1">
+                <a:solidFill>
+                  <a:srgbClr val="AAAAAA"/>
+                </a:solidFill>
+                <a:latin typeface="Arial"/>
+              </a:rPr>
+              <a:t>kami no kodomo Yes I am</a:t>
+            </a:r>
+          </a:p>
+        </p:txBody>
+      </p:sp>
+      <p:sp>
+        <p:nvSpPr>
+          <p:cNvPr id="6" name="TextBox 5"/>
+          <p:cNvSpPr txBox="1"/>
+          <p:nvPr/>
+        </p:nvSpPr>
+        <p:spPr>
+          <a:xfrm>
+            <a:off x="640080" y="4530852"/>
+            <a:ext cx="10911535" cy="310896"/>
           </a:xfrm>
           <a:prstGeom prst="rect">
             <a:avLst/>
@@ -6417,81 +5822,11 @@
             <a:r>
               <a:rPr sz="2000" b="0" i="1">
                 <a:solidFill>
-                  <a:srgbClr val="8C8C8C"/>
-                </a:solidFill>
-                <a:latin typeface="Arial"/>
-              </a:rPr>
-              <a:t/>
-            </a:r>
-          </a:p>
-        </p:txBody>
-      </p:sp>
-      <p:sp>
-        <p:nvSpPr>
-          <p:cNvPr id="5" name="TextBox 4"/>
-          <p:cNvSpPr txBox="1"/>
-          <p:nvPr/>
-        </p:nvSpPr>
-        <p:spPr>
-          <a:xfrm>
-            <a:off x="594360" y="3529584"/>
-            <a:ext cx="11002975" cy="685800"/>
-          </a:xfrm>
-          <a:prstGeom prst="rect">
-            <a:avLst/>
-          </a:prstGeom>
-          <a:noFill/>
-        </p:spPr>
-        <p:txBody>
-          <a:bodyPr wrap="square">
-            <a:spAutoFit/>
-          </a:bodyPr>
-          <a:lstStyle/>
-          <a:p>
-            <a:pPr algn="ctr"/>
-            <a:r>
-              <a:rPr sz="4400" b="1" i="0">
-                <a:solidFill>
-                  <a:srgbClr val="FFFFFF"/>
-                </a:solidFill>
-                <a:latin typeface="Arial"/>
-              </a:rPr>
-              <a:t>神の子ども Yes I am</a:t>
-            </a:r>
-          </a:p>
-        </p:txBody>
-      </p:sp>
-      <p:sp>
-        <p:nvSpPr>
-          <p:cNvPr id="6" name="TextBox 5"/>
-          <p:cNvSpPr txBox="1"/>
-          <p:nvPr/>
-        </p:nvSpPr>
-        <p:spPr>
-          <a:xfrm>
-            <a:off x="594360" y="4251960"/>
-            <a:ext cx="11002975" cy="384048"/>
-          </a:xfrm>
-          <a:prstGeom prst="rect">
-            <a:avLst/>
-          </a:prstGeom>
-          <a:noFill/>
-        </p:spPr>
-        <p:txBody>
-          <a:bodyPr wrap="square">
-            <a:spAutoFit/>
-          </a:bodyPr>
-          <a:lstStyle/>
-          <a:p>
-            <a:pPr algn="ctr"/>
-            <a:r>
-              <a:rPr sz="2400" b="0" i="1">
-                <a:solidFill>
-                  <a:srgbClr val="B4B4B4"/>
-                </a:solidFill>
-                <a:latin typeface="Arial"/>
-              </a:rPr>
-              <a:t>kami no kodomo Yes I am</a:t>
+                  <a:srgbClr val="828282"/>
+                </a:solidFill>
+                <a:latin typeface="Arial"/>
+              </a:rPr>
+              <a:t>Sou filho de Deus</a:t>
             </a:r>
           </a:p>
         </p:txBody>
@@ -6504,8 +5839,8 @@
         </p:nvSpPr>
         <p:spPr>
           <a:xfrm>
-            <a:off x="594360" y="4672584"/>
-            <a:ext cx="11002975" cy="347472"/>
+            <a:off x="640080" y="4896612"/>
+            <a:ext cx="10911535" cy="310896"/>
           </a:xfrm>
           <a:prstGeom prst="rect">
             <a:avLst/>
@@ -6522,11 +5857,11 @@
             <a:r>
               <a:rPr sz="2000" b="0" i="1">
                 <a:solidFill>
-                  <a:srgbClr val="8C8C8C"/>
-                </a:solidFill>
-                <a:latin typeface="Arial"/>
-              </a:rPr>
-              <a:t/>
+                  <a:srgbClr val="828282"/>
+                </a:solidFill>
+                <a:latin typeface="Arial"/>
+              </a:rPr>
+              <a:t>Não mais escravo do medo</a:t>
             </a:r>
           </a:p>
         </p:txBody>
@@ -6565,23 +5900,23 @@
         </p:nvSpPr>
         <p:spPr>
           <a:xfrm>
-            <a:off x="594360" y="1837944"/>
-            <a:ext cx="11002975" cy="685800"/>
-          </a:xfrm>
-          <a:prstGeom prst="rect">
-            <a:avLst/>
-          </a:prstGeom>
-          <a:noFill/>
-        </p:spPr>
-        <p:txBody>
-          <a:bodyPr wrap="square">
-            <a:spAutoFit/>
-          </a:bodyPr>
-          <a:lstStyle/>
-          <a:p>
-            <a:pPr algn="ctr"/>
-            <a:r>
-              <a:rPr sz="4400" b="1" i="0">
+            <a:off x="640080" y="1650492"/>
+            <a:ext cx="10911535" cy="731520"/>
+          </a:xfrm>
+          <a:prstGeom prst="rect">
+            <a:avLst/>
+          </a:prstGeom>
+          <a:noFill/>
+        </p:spPr>
+        <p:txBody>
+          <a:bodyPr wrap="square">
+            <a:spAutoFit/>
+          </a:bodyPr>
+          <a:lstStyle/>
+          <a:p>
+            <a:pPr algn="ctr"/>
+            <a:r>
+              <a:rPr sz="4800" b="1" i="0">
                 <a:solidFill>
                   <a:srgbClr val="FFFFFF"/>
                 </a:solidFill>
@@ -6600,8 +5935,8 @@
         </p:nvSpPr>
         <p:spPr>
           <a:xfrm>
-            <a:off x="594360" y="2560320"/>
-            <a:ext cx="11002975" cy="384048"/>
+            <a:off x="640080" y="2418588"/>
+            <a:ext cx="10911535" cy="365760"/>
           </a:xfrm>
           <a:prstGeom prst="rect">
             <a:avLst/>
@@ -6618,7 +5953,7 @@
             <a:r>
               <a:rPr sz="2400" b="0" i="1">
                 <a:solidFill>
-                  <a:srgbClr val="B4B4B4"/>
+                  <a:srgbClr val="AAAAAA"/>
                 </a:solidFill>
                 <a:latin typeface="Arial"/>
               </a:rPr>
@@ -6635,8 +5970,78 @@
         </p:nvSpPr>
         <p:spPr>
           <a:xfrm>
-            <a:off x="594360" y="2980944"/>
-            <a:ext cx="11002975" cy="347472"/>
+            <a:off x="640080" y="2985516"/>
+            <a:ext cx="10911535" cy="731520"/>
+          </a:xfrm>
+          <a:prstGeom prst="rect">
+            <a:avLst/>
+          </a:prstGeom>
+          <a:noFill/>
+        </p:spPr>
+        <p:txBody>
+          <a:bodyPr wrap="square">
+            <a:spAutoFit/>
+          </a:bodyPr>
+          <a:lstStyle/>
+          <a:p>
+            <a:pPr algn="ctr"/>
+            <a:r>
+              <a:rPr sz="4800" b="1" i="0">
+                <a:solidFill>
+                  <a:srgbClr val="FFFFFF"/>
+                </a:solidFill>
+                <a:latin typeface="Arial"/>
+              </a:rPr>
+              <a:t>神の子ども Yes I am</a:t>
+            </a:r>
+          </a:p>
+        </p:txBody>
+      </p:sp>
+      <p:sp>
+        <p:nvSpPr>
+          <p:cNvPr id="5" name="TextBox 4"/>
+          <p:cNvSpPr txBox="1"/>
+          <p:nvPr/>
+        </p:nvSpPr>
+        <p:spPr>
+          <a:xfrm>
+            <a:off x="640080" y="3753612"/>
+            <a:ext cx="10911535" cy="365760"/>
+          </a:xfrm>
+          <a:prstGeom prst="rect">
+            <a:avLst/>
+          </a:prstGeom>
+          <a:noFill/>
+        </p:spPr>
+        <p:txBody>
+          <a:bodyPr wrap="square">
+            <a:spAutoFit/>
+          </a:bodyPr>
+          <a:lstStyle/>
+          <a:p>
+            <a:pPr algn="ctr"/>
+            <a:r>
+              <a:rPr sz="2400" b="0" i="1">
+                <a:solidFill>
+                  <a:srgbClr val="AAAAAA"/>
+                </a:solidFill>
+                <a:latin typeface="Arial"/>
+              </a:rPr>
+              <a:t>kami no kodomo</a:t>
+            </a:r>
+          </a:p>
+        </p:txBody>
+      </p:sp>
+      <p:sp>
+        <p:nvSpPr>
+          <p:cNvPr id="6" name="TextBox 5"/>
+          <p:cNvSpPr txBox="1"/>
+          <p:nvPr/>
+        </p:nvSpPr>
+        <p:spPr>
+          <a:xfrm>
+            <a:off x="640080" y="4530852"/>
+            <a:ext cx="10911535" cy="310896"/>
           </a:xfrm>
           <a:prstGeom prst="rect">
             <a:avLst/>
@@ -6653,81 +6058,11 @@
             <a:r>
               <a:rPr sz="2000" b="0" i="1">
                 <a:solidFill>
-                  <a:srgbClr val="8C8C8C"/>
-                </a:solidFill>
-                <a:latin typeface="Arial"/>
-              </a:rPr>
-              <a:t/>
-            </a:r>
-          </a:p>
-        </p:txBody>
-      </p:sp>
-      <p:sp>
-        <p:nvSpPr>
-          <p:cNvPr id="5" name="TextBox 4"/>
-          <p:cNvSpPr txBox="1"/>
-          <p:nvPr/>
-        </p:nvSpPr>
-        <p:spPr>
-          <a:xfrm>
-            <a:off x="594360" y="3529584"/>
-            <a:ext cx="11002975" cy="685800"/>
-          </a:xfrm>
-          <a:prstGeom prst="rect">
-            <a:avLst/>
-          </a:prstGeom>
-          <a:noFill/>
-        </p:spPr>
-        <p:txBody>
-          <a:bodyPr wrap="square">
-            <a:spAutoFit/>
-          </a:bodyPr>
-          <a:lstStyle/>
-          <a:p>
-            <a:pPr algn="ctr"/>
-            <a:r>
-              <a:rPr sz="4400" b="1" i="0">
-                <a:solidFill>
-                  <a:srgbClr val="FFFFFF"/>
-                </a:solidFill>
-                <a:latin typeface="Arial"/>
-              </a:rPr>
-              <a:t>神の子ども Yes I am</a:t>
-            </a:r>
-          </a:p>
-        </p:txBody>
-      </p:sp>
-      <p:sp>
-        <p:nvSpPr>
-          <p:cNvPr id="6" name="TextBox 5"/>
-          <p:cNvSpPr txBox="1"/>
-          <p:nvPr/>
-        </p:nvSpPr>
-        <p:spPr>
-          <a:xfrm>
-            <a:off x="594360" y="4251960"/>
-            <a:ext cx="11002975" cy="384048"/>
-          </a:xfrm>
-          <a:prstGeom prst="rect">
-            <a:avLst/>
-          </a:prstGeom>
-          <a:noFill/>
-        </p:spPr>
-        <p:txBody>
-          <a:bodyPr wrap="square">
-            <a:spAutoFit/>
-          </a:bodyPr>
-          <a:lstStyle/>
-          <a:p>
-            <a:pPr algn="ctr"/>
-            <a:r>
-              <a:rPr sz="2400" b="0" i="1">
-                <a:solidFill>
-                  <a:srgbClr val="B4B4B4"/>
-                </a:solidFill>
-                <a:latin typeface="Arial"/>
-              </a:rPr>
-              <a:t>kami no kodomo</a:t>
+                  <a:srgbClr val="828282"/>
+                </a:solidFill>
+                <a:latin typeface="Arial"/>
+              </a:rPr>
+              <a:t>Sou filho de Deus</a:t>
             </a:r>
           </a:p>
         </p:txBody>
@@ -6740,8 +6075,8 @@
         </p:nvSpPr>
         <p:spPr>
           <a:xfrm>
-            <a:off x="594360" y="4672584"/>
-            <a:ext cx="11002975" cy="347472"/>
+            <a:off x="640080" y="4896612"/>
+            <a:ext cx="10911535" cy="310896"/>
           </a:xfrm>
           <a:prstGeom prst="rect">
             <a:avLst/>
@@ -6758,11 +6093,11 @@
             <a:r>
               <a:rPr sz="2000" b="0" i="1">
                 <a:solidFill>
-                  <a:srgbClr val="8C8C8C"/>
-                </a:solidFill>
-                <a:latin typeface="Arial"/>
-              </a:rPr>
-              <a:t/>
+                  <a:srgbClr val="828282"/>
+                </a:solidFill>
+                <a:latin typeface="Arial"/>
+              </a:rPr>
+              <a:t>No lugar de dor e de vergonha</a:t>
             </a:r>
           </a:p>
         </p:txBody>

--- a/output_pptx/Who_You_Say_I_Am.pptx
+++ b/output_pptx/Who_You_Say_I_Am.pptx
@@ -3350,6 +3350,76 @@
           </a:p>
         </p:txBody>
       </p:sp>
+      <p:sp>
+        <p:nvSpPr>
+          <p:cNvPr id="4" name="TextBox 3"/>
+          <p:cNvSpPr txBox="1"/>
+          <p:nvPr/>
+        </p:nvSpPr>
+        <p:spPr>
+          <a:xfrm>
+            <a:off x="640080" y="4128516"/>
+            <a:ext cx="10911535" cy="310896"/>
+          </a:xfrm>
+          <a:prstGeom prst="rect">
+            <a:avLst/>
+          </a:prstGeom>
+          <a:noFill/>
+        </p:spPr>
+        <p:txBody>
+          <a:bodyPr wrap="square">
+            <a:spAutoFit/>
+          </a:bodyPr>
+          <a:lstStyle/>
+          <a:p>
+            <a:pPr algn="ctr"/>
+            <a:r>
+              <a:rPr sz="2000" b="0" i="0">
+                <a:solidFill>
+                  <a:srgbClr val="828282"/>
+                </a:solidFill>
+                <a:latin typeface="Arial"/>
+              </a:rPr>
+              <a:t>十字架が立てられました</a:t>
+            </a:r>
+          </a:p>
+        </p:txBody>
+      </p:sp>
+      <p:sp>
+        <p:nvSpPr>
+          <p:cNvPr id="5" name="TextBox 4"/>
+          <p:cNvSpPr txBox="1"/>
+          <p:nvPr/>
+        </p:nvSpPr>
+        <p:spPr>
+          <a:xfrm>
+            <a:off x="640080" y="4494276"/>
+            <a:ext cx="10911535" cy="310896"/>
+          </a:xfrm>
+          <a:prstGeom prst="rect">
+            <a:avLst/>
+          </a:prstGeom>
+          <a:noFill/>
+        </p:spPr>
+        <p:txBody>
+          <a:bodyPr wrap="square">
+            <a:spAutoFit/>
+          </a:bodyPr>
+          <a:lstStyle/>
+          <a:p>
+            <a:pPr algn="ctr"/>
+            <a:r>
+              <a:rPr sz="2000" b="0" i="0">
+                <a:solidFill>
+                  <a:srgbClr val="828282"/>
+                </a:solidFill>
+                <a:latin typeface="Arial"/>
+              </a:rPr>
+              <a:t>私の罪は消し去られました</a:t>
+            </a:r>
+          </a:p>
+        </p:txBody>
+      </p:sp>
     </p:spTree>
   </p:cSld>
   <p:clrMapOvr>
@@ -3446,6 +3516,76 @@
           </a:p>
         </p:txBody>
       </p:sp>
+      <p:sp>
+        <p:nvSpPr>
+          <p:cNvPr id="4" name="TextBox 3"/>
+          <p:cNvSpPr txBox="1"/>
+          <p:nvPr/>
+        </p:nvSpPr>
+        <p:spPr>
+          <a:xfrm>
+            <a:off x="640080" y="4128516"/>
+            <a:ext cx="10911535" cy="310896"/>
+          </a:xfrm>
+          <a:prstGeom prst="rect">
+            <a:avLst/>
+          </a:prstGeom>
+          <a:noFill/>
+        </p:spPr>
+        <p:txBody>
+          <a:bodyPr wrap="square">
+            <a:spAutoFit/>
+          </a:bodyPr>
+          <a:lstStyle/>
+          <a:p>
+            <a:pPr algn="ctr"/>
+            <a:r>
+              <a:rPr sz="2000" b="0" i="0">
+                <a:solidFill>
+                  <a:srgbClr val="828282"/>
+                </a:solidFill>
+                <a:latin typeface="Arial"/>
+              </a:rPr>
+              <a:t>カルバリで私は救われました</a:t>
+            </a:r>
+          </a:p>
+        </p:txBody>
+      </p:sp>
+      <p:sp>
+        <p:nvSpPr>
+          <p:cNvPr id="5" name="TextBox 4"/>
+          <p:cNvSpPr txBox="1"/>
+          <p:nvPr/>
+        </p:nvSpPr>
+        <p:spPr>
+          <a:xfrm>
+            <a:off x="640080" y="4494276"/>
+            <a:ext cx="10911535" cy="310896"/>
+          </a:xfrm>
+          <a:prstGeom prst="rect">
+            <a:avLst/>
+          </a:prstGeom>
+          <a:noFill/>
+        </p:spPr>
+        <p:txBody>
+          <a:bodyPr wrap="square">
+            <a:spAutoFit/>
+          </a:bodyPr>
+          <a:lstStyle/>
+          <a:p>
+            <a:pPr algn="ctr"/>
+            <a:r>
+              <a:rPr sz="2000" b="0" i="0">
+                <a:solidFill>
+                  <a:srgbClr val="828282"/>
+                </a:solidFill>
+                <a:latin typeface="Arial"/>
+              </a:rPr>
+              <a:t>十字架が立てられました</a:t>
+            </a:r>
+          </a:p>
+        </p:txBody>
+      </p:sp>
     </p:spTree>
   </p:cSld>
   <p:clrMapOvr>
@@ -3507,6 +3647,41 @@
           </a:p>
         </p:txBody>
       </p:sp>
+      <p:sp>
+        <p:nvSpPr>
+          <p:cNvPr id="3" name="TextBox 2"/>
+          <p:cNvSpPr txBox="1"/>
+          <p:nvPr/>
+        </p:nvSpPr>
+        <p:spPr>
+          <a:xfrm>
+            <a:off x="640080" y="3845052"/>
+            <a:ext cx="10911535" cy="310896"/>
+          </a:xfrm>
+          <a:prstGeom prst="rect">
+            <a:avLst/>
+          </a:prstGeom>
+          <a:noFill/>
+        </p:spPr>
+        <p:txBody>
+          <a:bodyPr wrap="square">
+            <a:spAutoFit/>
+          </a:bodyPr>
+          <a:lstStyle/>
+          <a:p>
+            <a:pPr algn="ctr"/>
+            <a:r>
+              <a:rPr sz="2000" b="0" i="0">
+                <a:solidFill>
+                  <a:srgbClr val="828282"/>
+                </a:solidFill>
+                <a:latin typeface="Arial"/>
+              </a:rPr>
+              <a:t>私の罪は消し去られました</a:t>
+            </a:r>
+          </a:p>
+        </p:txBody>
+      </p:sp>
     </p:spTree>
   </p:cSld>
   <p:clrMapOvr>
@@ -4145,6 +4320,76 @@
           </a:p>
         </p:txBody>
       </p:sp>
+      <p:sp>
+        <p:nvSpPr>
+          <p:cNvPr id="6" name="TextBox 5"/>
+          <p:cNvSpPr txBox="1"/>
+          <p:nvPr/>
+        </p:nvSpPr>
+        <p:spPr>
+          <a:xfrm>
+            <a:off x="640080" y="4530852"/>
+            <a:ext cx="10911535" cy="310896"/>
+          </a:xfrm>
+          <a:prstGeom prst="rect">
+            <a:avLst/>
+          </a:prstGeom>
+          <a:noFill/>
+        </p:spPr>
+        <p:txBody>
+          <a:bodyPr wrap="square">
+            <a:spAutoFit/>
+          </a:bodyPr>
+          <a:lstStyle/>
+          <a:p>
+            <a:pPr algn="ctr"/>
+            <a:r>
+              <a:rPr sz="2000" b="0" i="1">
+                <a:solidFill>
+                  <a:srgbClr val="828282"/>
+                </a:solidFill>
+                <a:latin typeface="Arial"/>
+              </a:rPr>
+              <a:t>Você me escolheu</a:t>
+            </a:r>
+          </a:p>
+        </p:txBody>
+      </p:sp>
+      <p:sp>
+        <p:nvSpPr>
+          <p:cNvPr id="7" name="TextBox 6"/>
+          <p:cNvSpPr txBox="1"/>
+          <p:nvPr/>
+        </p:nvSpPr>
+        <p:spPr>
+          <a:xfrm>
+            <a:off x="640080" y="4896612"/>
+            <a:ext cx="10911535" cy="310896"/>
+          </a:xfrm>
+          <a:prstGeom prst="rect">
+            <a:avLst/>
+          </a:prstGeom>
+          <a:noFill/>
+        </p:spPr>
+        <p:txBody>
+          <a:bodyPr wrap="square">
+            <a:spAutoFit/>
+          </a:bodyPr>
+          <a:lstStyle/>
+          <a:p>
+            <a:pPr algn="ctr"/>
+            <a:r>
+              <a:rPr sz="2000" b="0" i="1">
+                <a:solidFill>
+                  <a:srgbClr val="828282"/>
+                </a:solidFill>
+                <a:latin typeface="Arial"/>
+              </a:rPr>
+              <a:t>Como foi dito</a:t>
+            </a:r>
+          </a:p>
+        </p:txBody>
+      </p:sp>
     </p:spTree>
   </p:cSld>
   <p:clrMapOvr>
@@ -4311,6 +4556,76 @@
           </a:p>
         </p:txBody>
       </p:sp>
+      <p:sp>
+        <p:nvSpPr>
+          <p:cNvPr id="6" name="TextBox 5"/>
+          <p:cNvSpPr txBox="1"/>
+          <p:nvPr/>
+        </p:nvSpPr>
+        <p:spPr>
+          <a:xfrm>
+            <a:off x="640080" y="4530852"/>
+            <a:ext cx="10911535" cy="310896"/>
+          </a:xfrm>
+          <a:prstGeom prst="rect">
+            <a:avLst/>
+          </a:prstGeom>
+          <a:noFill/>
+        </p:spPr>
+        <p:txBody>
+          <a:bodyPr wrap="square">
+            <a:spAutoFit/>
+          </a:bodyPr>
+          <a:lstStyle/>
+          <a:p>
+            <a:pPr algn="ctr"/>
+            <a:r>
+              <a:rPr sz="2000" b="0" i="1">
+                <a:solidFill>
+                  <a:srgbClr val="828282"/>
+                </a:solidFill>
+                <a:latin typeface="Arial"/>
+              </a:rPr>
+              <a:t>Suas palavras</a:t>
+            </a:r>
+          </a:p>
+        </p:txBody>
+      </p:sp>
+      <p:sp>
+        <p:nvSpPr>
+          <p:cNvPr id="7" name="TextBox 6"/>
+          <p:cNvSpPr txBox="1"/>
+          <p:nvPr/>
+        </p:nvSpPr>
+        <p:spPr>
+          <a:xfrm>
+            <a:off x="640080" y="4896612"/>
+            <a:ext cx="10911535" cy="310896"/>
+          </a:xfrm>
+          <a:prstGeom prst="rect">
+            <a:avLst/>
+          </a:prstGeom>
+          <a:noFill/>
+        </p:spPr>
+        <p:txBody>
+          <a:bodyPr wrap="square">
+            <a:spAutoFit/>
+          </a:bodyPr>
+          <a:lstStyle/>
+          <a:p>
+            <a:pPr algn="ctr"/>
+            <a:r>
+              <a:rPr sz="2000" b="0" i="1">
+                <a:solidFill>
+                  <a:srgbClr val="828282"/>
+                </a:solidFill>
+                <a:latin typeface="Arial"/>
+              </a:rPr>
+              <a:t>Meu verdadeiro eu</a:t>
+            </a:r>
+          </a:p>
+        </p:txBody>
+      </p:sp>
     </p:spTree>
   </p:cSld>
   <p:clrMapOvr>
@@ -4477,6 +4792,76 @@
           </a:p>
         </p:txBody>
       </p:sp>
+      <p:sp>
+        <p:nvSpPr>
+          <p:cNvPr id="6" name="TextBox 5"/>
+          <p:cNvSpPr txBox="1"/>
+          <p:nvPr/>
+        </p:nvSpPr>
+        <p:spPr>
+          <a:xfrm>
+            <a:off x="640080" y="4530852"/>
+            <a:ext cx="10911535" cy="310896"/>
+          </a:xfrm>
+          <a:prstGeom prst="rect">
+            <a:avLst/>
+          </a:prstGeom>
+          <a:noFill/>
+        </p:spPr>
+        <p:txBody>
+          <a:bodyPr wrap="square">
+            <a:spAutoFit/>
+          </a:bodyPr>
+          <a:lstStyle/>
+          <a:p>
+            <a:pPr algn="ctr"/>
+            <a:r>
+              <a:rPr sz="2000" b="0" i="1">
+                <a:solidFill>
+                  <a:srgbClr val="828282"/>
+                </a:solidFill>
+                <a:latin typeface="Arial"/>
+              </a:rPr>
+              <a:t>Você me escolheu</a:t>
+            </a:r>
+          </a:p>
+        </p:txBody>
+      </p:sp>
+      <p:sp>
+        <p:nvSpPr>
+          <p:cNvPr id="7" name="TextBox 6"/>
+          <p:cNvSpPr txBox="1"/>
+          <p:nvPr/>
+        </p:nvSpPr>
+        <p:spPr>
+          <a:xfrm>
+            <a:off x="640080" y="4896612"/>
+            <a:ext cx="10911535" cy="310896"/>
+          </a:xfrm>
+          <a:prstGeom prst="rect">
+            <a:avLst/>
+          </a:prstGeom>
+          <a:noFill/>
+        </p:spPr>
+        <p:txBody>
+          <a:bodyPr wrap="square">
+            <a:spAutoFit/>
+          </a:bodyPr>
+          <a:lstStyle/>
+          <a:p>
+            <a:pPr algn="ctr"/>
+            <a:r>
+              <a:rPr sz="2000" b="0" i="1">
+                <a:solidFill>
+                  <a:srgbClr val="828282"/>
+                </a:solidFill>
+                <a:latin typeface="Arial"/>
+              </a:rPr>
+              <a:t>Como foi dito</a:t>
+            </a:r>
+          </a:p>
+        </p:txBody>
+      </p:sp>
     </p:spTree>
   </p:cSld>
   <p:clrMapOvr>
@@ -4643,6 +5028,76 @@
           </a:p>
         </p:txBody>
       </p:sp>
+      <p:sp>
+        <p:nvSpPr>
+          <p:cNvPr id="6" name="TextBox 5"/>
+          <p:cNvSpPr txBox="1"/>
+          <p:nvPr/>
+        </p:nvSpPr>
+        <p:spPr>
+          <a:xfrm>
+            <a:off x="640080" y="4530852"/>
+            <a:ext cx="10911535" cy="310896"/>
+          </a:xfrm>
+          <a:prstGeom prst="rect">
+            <a:avLst/>
+          </a:prstGeom>
+          <a:noFill/>
+        </p:spPr>
+        <p:txBody>
+          <a:bodyPr wrap="square">
+            <a:spAutoFit/>
+          </a:bodyPr>
+          <a:lstStyle/>
+          <a:p>
+            <a:pPr algn="ctr"/>
+            <a:r>
+              <a:rPr sz="2000" b="0" i="1">
+                <a:solidFill>
+                  <a:srgbClr val="828282"/>
+                </a:solidFill>
+                <a:latin typeface="Arial"/>
+              </a:rPr>
+              <a:t>Suas palavras</a:t>
+            </a:r>
+          </a:p>
+        </p:txBody>
+      </p:sp>
+      <p:sp>
+        <p:nvSpPr>
+          <p:cNvPr id="7" name="TextBox 6"/>
+          <p:cNvSpPr txBox="1"/>
+          <p:nvPr/>
+        </p:nvSpPr>
+        <p:spPr>
+          <a:xfrm>
+            <a:off x="640080" y="4896612"/>
+            <a:ext cx="10911535" cy="310896"/>
+          </a:xfrm>
+          <a:prstGeom prst="rect">
+            <a:avLst/>
+          </a:prstGeom>
+          <a:noFill/>
+        </p:spPr>
+        <p:txBody>
+          <a:bodyPr wrap="square">
+            <a:spAutoFit/>
+          </a:bodyPr>
+          <a:lstStyle/>
+          <a:p>
+            <a:pPr algn="ctr"/>
+            <a:r>
+              <a:rPr sz="2000" b="0" i="1">
+                <a:solidFill>
+                  <a:srgbClr val="828282"/>
+                </a:solidFill>
+                <a:latin typeface="Arial"/>
+              </a:rPr>
+              <a:t>Meu verdadeiro eu</a:t>
+            </a:r>
+          </a:p>
+        </p:txBody>
+      </p:sp>
     </p:spTree>
   </p:cSld>
   <p:clrMapOvr>
@@ -4739,6 +5194,41 @@
           </a:p>
         </p:txBody>
       </p:sp>
+      <p:sp>
+        <p:nvSpPr>
+          <p:cNvPr id="4" name="TextBox 3"/>
+          <p:cNvSpPr txBox="1"/>
+          <p:nvPr/>
+        </p:nvSpPr>
+        <p:spPr>
+          <a:xfrm>
+            <a:off x="640080" y="4046220"/>
+            <a:ext cx="10911535" cy="310896"/>
+          </a:xfrm>
+          <a:prstGeom prst="rect">
+            <a:avLst/>
+          </a:prstGeom>
+          <a:noFill/>
+        </p:spPr>
+        <p:txBody>
+          <a:bodyPr wrap="square">
+            <a:spAutoFit/>
+          </a:bodyPr>
+          <a:lstStyle/>
+          <a:p>
+            <a:pPr algn="ctr"/>
+            <a:r>
+              <a:rPr sz="2000" b="0" i="1">
+                <a:solidFill>
+                  <a:srgbClr val="828282"/>
+                </a:solidFill>
+                <a:latin typeface="Arial"/>
+              </a:rPr>
+              <a:t>Me ensinaram</a:t>
+            </a:r>
+          </a:p>
+        </p:txBody>
+      </p:sp>
     </p:spTree>
   </p:cSld>
   <p:clrMapOvr>
@@ -4966,6 +5456,41 @@
           </a:p>
         </p:txBody>
       </p:sp>
+      <p:sp>
+        <p:nvSpPr>
+          <p:cNvPr id="3" name="TextBox 2"/>
+          <p:cNvSpPr txBox="1"/>
+          <p:nvPr/>
+        </p:nvSpPr>
+        <p:spPr>
+          <a:xfrm>
+            <a:off x="640080" y="3845052"/>
+            <a:ext cx="10911535" cy="310896"/>
+          </a:xfrm>
+          <a:prstGeom prst="rect">
+            <a:avLst/>
+          </a:prstGeom>
+          <a:noFill/>
+        </p:spPr>
+        <p:txBody>
+          <a:bodyPr wrap="square">
+            <a:spAutoFit/>
+          </a:bodyPr>
+          <a:lstStyle/>
+          <a:p>
+            <a:pPr algn="ctr"/>
+            <a:r>
+              <a:rPr sz="2000" b="0" i="0">
+                <a:solidFill>
+                  <a:srgbClr val="828282"/>
+                </a:solidFill>
+                <a:latin typeface="Arial"/>
+              </a:rPr>
+              <a:t>私は自由です</a:t>
+            </a:r>
+          </a:p>
+        </p:txBody>
+      </p:sp>
     </p:spTree>
   </p:cSld>
   <p:clrMapOvr>
@@ -5062,6 +5587,76 @@
           </a:p>
         </p:txBody>
       </p:sp>
+      <p:sp>
+        <p:nvSpPr>
+          <p:cNvPr id="4" name="TextBox 3"/>
+          <p:cNvSpPr txBox="1"/>
+          <p:nvPr/>
+        </p:nvSpPr>
+        <p:spPr>
+          <a:xfrm>
+            <a:off x="640080" y="4128516"/>
+            <a:ext cx="10911535" cy="310896"/>
+          </a:xfrm>
+          <a:prstGeom prst="rect">
+            <a:avLst/>
+          </a:prstGeom>
+          <a:noFill/>
+        </p:spPr>
+        <p:txBody>
+          <a:bodyPr wrap="square">
+            <a:spAutoFit/>
+          </a:bodyPr>
+          <a:lstStyle/>
+          <a:p>
+            <a:pPr algn="ctr"/>
+            <a:r>
+              <a:rPr sz="2000" b="0" i="0">
+                <a:solidFill>
+                  <a:srgbClr val="828282"/>
+                </a:solidFill>
+                <a:latin typeface="Arial"/>
+              </a:rPr>
+              <a:t>私は神の子です</a:t>
+            </a:r>
+          </a:p>
+        </p:txBody>
+      </p:sp>
+      <p:sp>
+        <p:nvSpPr>
+          <p:cNvPr id="5" name="TextBox 4"/>
+          <p:cNvSpPr txBox="1"/>
+          <p:nvPr/>
+        </p:nvSpPr>
+        <p:spPr>
+          <a:xfrm>
+            <a:off x="640080" y="4494276"/>
+            <a:ext cx="10911535" cy="310896"/>
+          </a:xfrm>
+          <a:prstGeom prst="rect">
+            <a:avLst/>
+          </a:prstGeom>
+          <a:noFill/>
+        </p:spPr>
+        <p:txBody>
+          <a:bodyPr wrap="square">
+            <a:spAutoFit/>
+          </a:bodyPr>
+          <a:lstStyle/>
+          <a:p>
+            <a:pPr algn="ctr"/>
+            <a:r>
+              <a:rPr sz="2000" b="0" i="0">
+                <a:solidFill>
+                  <a:srgbClr val="828282"/>
+                </a:solidFill>
+                <a:latin typeface="Arial"/>
+              </a:rPr>
+              <a:t>もはや恐れの奴隷ではありません</a:t>
+            </a:r>
+          </a:p>
+        </p:txBody>
+      </p:sp>
     </p:spTree>
   </p:cSld>
   <p:clrMapOvr>
@@ -5154,6 +5749,76 @@
                 <a:latin typeface="Arial"/>
               </a:rPr>
               <a:t>No lugar de dor e de vergonha</a:t>
+            </a:r>
+          </a:p>
+        </p:txBody>
+      </p:sp>
+      <p:sp>
+        <p:nvSpPr>
+          <p:cNvPr id="4" name="TextBox 3"/>
+          <p:cNvSpPr txBox="1"/>
+          <p:nvPr/>
+        </p:nvSpPr>
+        <p:spPr>
+          <a:xfrm>
+            <a:off x="640080" y="4128516"/>
+            <a:ext cx="10911535" cy="310896"/>
+          </a:xfrm>
+          <a:prstGeom prst="rect">
+            <a:avLst/>
+          </a:prstGeom>
+          <a:noFill/>
+        </p:spPr>
+        <p:txBody>
+          <a:bodyPr wrap="square">
+            <a:spAutoFit/>
+          </a:bodyPr>
+          <a:lstStyle/>
+          <a:p>
+            <a:pPr algn="ctr"/>
+            <a:r>
+              <a:rPr sz="2000" b="0" i="0">
+                <a:solidFill>
+                  <a:srgbClr val="828282"/>
+                </a:solidFill>
+                <a:latin typeface="Arial"/>
+              </a:rPr>
+              <a:t>私は神の子です</a:t>
+            </a:r>
+          </a:p>
+        </p:txBody>
+      </p:sp>
+      <p:sp>
+        <p:nvSpPr>
+          <p:cNvPr id="5" name="TextBox 4"/>
+          <p:cNvSpPr txBox="1"/>
+          <p:nvPr/>
+        </p:nvSpPr>
+        <p:spPr>
+          <a:xfrm>
+            <a:off x="640080" y="4494276"/>
+            <a:ext cx="10911535" cy="310896"/>
+          </a:xfrm>
+          <a:prstGeom prst="rect">
+            <a:avLst/>
+          </a:prstGeom>
+          <a:noFill/>
+        </p:spPr>
+        <p:txBody>
+          <a:bodyPr wrap="square">
+            <a:spAutoFit/>
+          </a:bodyPr>
+          <a:lstStyle/>
+          <a:p>
+            <a:pPr algn="ctr"/>
+            <a:r>
+              <a:rPr sz="2000" b="0" i="0">
+                <a:solidFill>
+                  <a:srgbClr val="828282"/>
+                </a:solidFill>
+                <a:latin typeface="Arial"/>
+              </a:rPr>
+              <a:t>痛みと恥の場所に</a:t>
             </a:r>
           </a:p>
         </p:txBody>
